--- a/abbildungen/kap3/Exemplarische_Praemissenplanung.pptx
+++ b/abbildungen/kap3/Exemplarische_Praemissenplanung.pptx
@@ -7,7 +7,7 @@
   <p:sldIdLst>
     <p:sldId id="256" r:id="rId7"/>
   </p:sldIdLst>
-  <p:sldSz cx="3960000" cy="3954553" type="screen4x3"/>
+  <p:sldSz cx="3960000" cy="4172435" type="screen4x3"/>
   <p:notesSz cx="6858000" cy="9144000"/>
   <p:defaultTextStyle>
     <a:defPPr>
@@ -3097,7 +3097,7 @@
         <p:spPr>
           <a:xfrm>
             <a:off x="2724" y="2724"/>
-            <a:ext cx="3954553" cy="3949106"/>
+            <a:ext cx="3954553" cy="4166988"/>
           </a:xfrm>
           <a:prstGeom prst="rect">
             <a:avLst/>
@@ -3119,45 +3119,37 @@
           </a:p>
         </p:txBody>
       </p:sp>
-      <p:sp>
-        <p:nvSpPr>
-          <p:cNvPr id="3" name="kopf"/>
-          <p:cNvSpPr/>
-          <p:nvPr/>
-        </p:nvSpPr>
-        <p:spPr>
-          <a:xfrm>
-            <a:off x="5447" y="5447"/>
-            <a:ext cx="3949106" cy="163411"/>
-          </a:xfrm>
-          <a:prstGeom prst="rect">
-            <a:avLst/>
-          </a:prstGeom>
-          <a:solidFill>
-            <a:srgbClr val="3A3F44"/>
-          </a:solidFill>
-          <a:ln>
-            <a:noFill/>
+      <p:cxnSp>
+        <p:nvCxnSpPr>
+          <p:cNvPr id="3" name="Linie"/>
+          <p:cNvCxnSpPr/>
+          <p:nvPr/>
+        </p:nvCxnSpPr>
+        <p:spPr>
+          <a:xfrm>
+            <a:off x="87153" y="384017"/>
+            <a:ext cx="3785694" cy="0"/>
+          </a:xfrm>
+          <a:prstGeom prst="line">
+            <a:avLst/>
+          </a:prstGeom>
+          <a:ln w="5447">
+            <a:solidFill>
+              <a:srgbClr val="D9D9D9"/>
+            </a:solidFill>
           </a:ln>
         </p:spPr>
-        <p:txBody>
-          <a:bodyPr rtlCol="0" anchor="ctr"/>
-          <a:lstStyle/>
-          <a:p>
-            <a:pPr algn="ctr"/>
-          </a:p>
-        </p:txBody>
-      </p:sp>
-      <p:sp>
-        <p:nvSpPr>
-          <p:cNvPr id="4" name="Text SPAN"/>
+      </p:cxnSp>
+      <p:sp>
+        <p:nvSpPr>
+          <p:cNvPr id="4" name="Text kopf-titel"/>
           <p:cNvSpPr txBox="1"/>
           <p:nvPr/>
         </p:nvSpPr>
         <p:spPr>
           <a:xfrm>
-            <a:off x="87153" y="33554"/>
-            <a:ext cx="613814" cy="92600"/>
+            <a:off x="87153" y="66236"/>
+            <a:ext cx="1111452" cy="136176"/>
           </a:xfrm>
           <a:prstGeom prst="rect">
             <a:avLst/>
@@ -3172,26 +3164,61 @@
           <a:p>
             <a:pPr algn="l"/>
             <a:r>
-              <a:rPr sz="686" b="1" i="0" u="none" lang="de-DE">
-                <a:solidFill>
-                  <a:srgbClr val="FFFFFF"/>
+              <a:rPr sz="944" b="1" i="0" u="none" lang="de-DE">
+                <a:solidFill>
+                  <a:srgbClr val="1A1A1A"/>
                 </a:solidFill>
                 <a:latin typeface="Arial"/>
               </a:rPr>
-              <a:t>Planungsbrief</a:t>
-            </a:r>
-          </a:p>
-        </p:txBody>
-      </p:sp>
-      <p:sp>
-        <p:nvSpPr>
-          <p:cNvPr id="5" name="band-allgemein"/>
+              <a:t>Planungsvorgaben</a:t>
+            </a:r>
+          </a:p>
+        </p:txBody>
+      </p:sp>
+      <p:sp>
+        <p:nvSpPr>
+          <p:cNvPr id="5" name="Text kopf-unter"/>
+          <p:cNvSpPr txBox="1"/>
+          <p:nvPr/>
+        </p:nvSpPr>
+        <p:spPr>
+          <a:xfrm>
+            <a:off x="87153" y="229647"/>
+            <a:ext cx="1135198" cy="87153"/>
+          </a:xfrm>
+          <a:prstGeom prst="rect">
+            <a:avLst/>
+          </a:prstGeom>
+          <a:noFill/>
+        </p:spPr>
+        <p:txBody>
+          <a:bodyPr wrap="none" lIns="0" rIns="0" tIns="0" bIns="0" anchor="t">
+            <a:noAutofit/>
+          </a:bodyPr>
+          <a:lstStyle/>
+          <a:p>
+            <a:pPr algn="l"/>
+            <a:r>
+              <a:rPr sz="600" b="0" i="0" u="none" lang="de-DE">
+                <a:solidFill>
+                  <a:srgbClr val="4D4D4D"/>
+                </a:solidFill>
+                <a:latin typeface="Arial"/>
+              </a:rPr>
+              <a:t>Budget 2028 · Stand 30.06.2027</a:t>
+            </a:r>
+          </a:p>
+        </p:txBody>
+      </p:sp>
+      <p:sp>
+        <p:nvSpPr>
+          <p:cNvPr id="6" name="band-allgemein"/>
           <p:cNvSpPr/>
           <p:nvPr/>
         </p:nvSpPr>
         <p:spPr>
           <a:xfrm>
-            <a:off x="87153" y="245117"/>
+            <a:off x="87153" y="462999"/>
             <a:ext cx="3785695" cy="141623"/>
           </a:xfrm>
           <a:prstGeom prst="rect">
@@ -3214,13 +3241,13 @@
       </p:sp>
       <p:sp>
         <p:nvSpPr>
-          <p:cNvPr id="6" name="Text band-allgemein"/>
+          <p:cNvPr id="7" name="Text band-allgemein"/>
           <p:cNvSpPr txBox="1"/>
           <p:nvPr/>
         </p:nvSpPr>
         <p:spPr>
           <a:xfrm>
-            <a:off x="130729" y="267777"/>
+            <a:off x="130729" y="485658"/>
             <a:ext cx="1477851" cy="87153"/>
           </a:xfrm>
           <a:prstGeom prst="rect">
@@ -3249,13 +3276,13 @@
       </p:sp>
       <p:sp>
         <p:nvSpPr>
-          <p:cNvPr id="7" name="Text mk-label"/>
+          <p:cNvPr id="8" name="Text mk-label"/>
           <p:cNvSpPr txBox="1"/>
           <p:nvPr/>
         </p:nvSpPr>
         <p:spPr>
           <a:xfrm>
-            <a:off x="87153" y="463870"/>
+            <a:off x="87153" y="681752"/>
             <a:ext cx="732202" cy="87153"/>
           </a:xfrm>
           <a:prstGeom prst="rect">
@@ -3284,13 +3311,13 @@
       </p:sp>
       <p:sp>
         <p:nvSpPr>
-          <p:cNvPr id="8" name="f-budgetjahr"/>
+          <p:cNvPr id="9" name="f-budgetjahr"/>
           <p:cNvSpPr/>
           <p:nvPr/>
         </p:nvSpPr>
         <p:spPr>
           <a:xfrm>
-            <a:off x="1004979" y="443934"/>
+            <a:off x="1004979" y="661816"/>
             <a:ext cx="1040385" cy="136176"/>
           </a:xfrm>
           <a:prstGeom prst="roundRect">
@@ -3317,13 +3344,13 @@
       </p:sp>
       <p:sp>
         <p:nvSpPr>
-          <p:cNvPr id="9" name="Text SPAN"/>
+          <p:cNvPr id="10" name="Text SPAN"/>
           <p:cNvSpPr txBox="1"/>
           <p:nvPr/>
         </p:nvSpPr>
         <p:spPr>
           <a:xfrm>
-            <a:off x="1045832" y="463870"/>
+            <a:off x="1045832" y="681752"/>
             <a:ext cx="465211" cy="87153"/>
           </a:xfrm>
           <a:prstGeom prst="rect">
@@ -3345,20 +3372,20 @@
                 </a:solidFill>
                 <a:latin typeface="Arial"/>
               </a:rPr>
-              <a:t>Budget 2027</a:t>
-            </a:r>
-          </a:p>
-        </p:txBody>
-      </p:sp>
-      <p:sp>
-        <p:nvSpPr>
-          <p:cNvPr id="10" name="Form"/>
+              <a:t>Budget 2028</a:t>
+            </a:r>
+          </a:p>
+        </p:txBody>
+      </p:sp>
+      <p:sp>
+        <p:nvSpPr>
+          <p:cNvPr id="11" name="Form"/>
           <p:cNvSpPr/>
           <p:nvPr/>
         </p:nvSpPr>
         <p:spPr>
           <a:xfrm>
-            <a:off x="1950041" y="501128"/>
+            <a:off x="1950041" y="719010"/>
             <a:ext cx="43577" cy="27235"/>
           </a:xfrm>
           <a:custGeom>
@@ -3399,13 +3426,13 @@
       </p:sp>
       <p:sp>
         <p:nvSpPr>
-          <p:cNvPr id="11" name="Text einheit"/>
+          <p:cNvPr id="12" name="Text einheit"/>
           <p:cNvSpPr txBox="1"/>
           <p:nvPr/>
         </p:nvSpPr>
         <p:spPr>
           <a:xfrm>
-            <a:off x="87153" y="681752"/>
+            <a:off x="87153" y="899634"/>
             <a:ext cx="520022" cy="87153"/>
           </a:xfrm>
           <a:prstGeom prst="rect">
@@ -3434,13 +3461,13 @@
       </p:sp>
       <p:sp>
         <p:nvSpPr>
-          <p:cNvPr id="12" name="sp-1"/>
+          <p:cNvPr id="13" name="sp-1"/>
           <p:cNvSpPr/>
           <p:nvPr/>
         </p:nvSpPr>
         <p:spPr>
           <a:xfrm>
-            <a:off x="1004979" y="661816"/>
+            <a:off x="1004979" y="879697"/>
             <a:ext cx="1040385" cy="136176"/>
           </a:xfrm>
           <a:prstGeom prst="roundRect">
@@ -3467,13 +3494,13 @@
       </p:sp>
       <p:sp>
         <p:nvSpPr>
-          <p:cNvPr id="13" name="Text SPAN"/>
+          <p:cNvPr id="14" name="Text SPAN"/>
           <p:cNvSpPr txBox="1"/>
           <p:nvPr/>
         </p:nvSpPr>
         <p:spPr>
           <a:xfrm>
-            <a:off x="1045832" y="681752"/>
+            <a:off x="1045832" y="899634"/>
             <a:ext cx="342227" cy="87153"/>
           </a:xfrm>
           <a:prstGeom prst="rect">
@@ -3502,13 +3529,1133 @@
       </p:sp>
       <p:sp>
         <p:nvSpPr>
-          <p:cNvPr id="14" name="Form"/>
+          <p:cNvPr id="15" name="Form"/>
           <p:cNvSpPr/>
           <p:nvPr/>
         </p:nvSpPr>
         <p:spPr>
           <a:xfrm>
-            <a:off x="1950041" y="719010"/>
+            <a:off x="1950041" y="936891"/>
+            <a:ext cx="43577" cy="27236"/>
+          </a:xfrm>
+          <a:custGeom>
+            <a:avLst/>
+            <a:gdLst/>
+            <a:ahLst/>
+            <a:cxnLst/>
+            <a:rect l="l" t="t" r="r" b="b"/>
+            <a:pathLst>
+              <a:path w="43577" h="27236">
+                <a:moveTo>
+                  <a:pt x="0" y="0"/>
+                </a:moveTo>
+                <a:lnTo>
+                  <a:pt x="43577" y="0"/>
+                </a:lnTo>
+                <a:lnTo>
+                  <a:pt x="21788" y="27236"/>
+                </a:lnTo>
+                <a:close/>
+              </a:path>
+            </a:pathLst>
+          </a:custGeom>
+          <a:solidFill>
+            <a:srgbClr val="3A3F44"/>
+          </a:solidFill>
+          <a:ln>
+            <a:noFill/>
+          </a:ln>
+        </p:spPr>
+        <p:txBody>
+          <a:bodyPr rtlCol="0" anchor="ctr"/>
+          <a:lstStyle/>
+          <a:p>
+            <a:pPr algn="ctr"/>
+          </a:p>
+        </p:txBody>
+      </p:sp>
+      <p:sp>
+        <p:nvSpPr>
+          <p:cNvPr id="16" name="sp-2"/>
+          <p:cNvSpPr/>
+          <p:nvPr/>
+        </p:nvSpPr>
+        <p:spPr>
+          <a:xfrm>
+            <a:off x="2159752" y="879697"/>
+            <a:ext cx="833398" cy="136176"/>
+          </a:xfrm>
+          <a:prstGeom prst="roundRect">
+            <a:avLst>
+              <a:gd name="adj" fmla="val 8000"/>
+            </a:avLst>
+          </a:prstGeom>
+          <a:solidFill>
+            <a:srgbClr val="FFFFFF"/>
+          </a:solidFill>
+          <a:ln w="5447">
+            <a:solidFill>
+              <a:srgbClr val="9A9A9A"/>
+            </a:solidFill>
+          </a:ln>
+        </p:spPr>
+        <p:txBody>
+          <a:bodyPr rtlCol="0" anchor="ctr"/>
+          <a:lstStyle/>
+          <a:p>
+            <a:pPr algn="ctr"/>
+          </a:p>
+        </p:txBody>
+      </p:sp>
+      <p:sp>
+        <p:nvSpPr>
+          <p:cNvPr id="17" name="Text SPAN"/>
+          <p:cNvSpPr txBox="1"/>
+          <p:nvPr/>
+        </p:nvSpPr>
+        <p:spPr>
+          <a:xfrm>
+            <a:off x="2200605" y="899634"/>
+            <a:ext cx="384527" cy="87153"/>
+          </a:xfrm>
+          <a:prstGeom prst="rect">
+            <a:avLst/>
+          </a:prstGeom>
+          <a:noFill/>
+        </p:spPr>
+        <p:txBody>
+          <a:bodyPr wrap="none" lIns="0" rIns="0" tIns="0" bIns="0" anchor="t">
+            <a:noAutofit/>
+          </a:bodyPr>
+          <a:lstStyle/>
+          <a:p>
+            <a:pPr algn="l"/>
+            <a:r>
+              <a:rPr sz="600" b="0" i="0" u="none" lang="de-DE">
+                <a:solidFill>
+                  <a:srgbClr val="1A1A1A"/>
+                </a:solidFill>
+                <a:latin typeface="Arial"/>
+              </a:rPr>
+              <a:t>Best Case</a:t>
+            </a:r>
+          </a:p>
+        </p:txBody>
+      </p:sp>
+      <p:sp>
+        <p:nvSpPr>
+          <p:cNvPr id="18" name="Form"/>
+          <p:cNvSpPr/>
+          <p:nvPr/>
+        </p:nvSpPr>
+        <p:spPr>
+          <a:xfrm>
+            <a:off x="2897827" y="936891"/>
+            <a:ext cx="43576" cy="27236"/>
+          </a:xfrm>
+          <a:custGeom>
+            <a:avLst/>
+            <a:gdLst/>
+            <a:ahLst/>
+            <a:cxnLst/>
+            <a:rect l="l" t="t" r="r" b="b"/>
+            <a:pathLst>
+              <a:path w="43576" h="27236">
+                <a:moveTo>
+                  <a:pt x="0" y="0"/>
+                </a:moveTo>
+                <a:lnTo>
+                  <a:pt x="43576" y="0"/>
+                </a:lnTo>
+                <a:lnTo>
+                  <a:pt x="21788" y="27236"/>
+                </a:lnTo>
+                <a:close/>
+              </a:path>
+            </a:pathLst>
+          </a:custGeom>
+          <a:solidFill>
+            <a:srgbClr val="3A3F44"/>
+          </a:solidFill>
+          <a:ln>
+            <a:noFill/>
+          </a:ln>
+        </p:spPr>
+        <p:txBody>
+          <a:bodyPr rtlCol="0" anchor="ctr"/>
+          <a:lstStyle/>
+          <a:p>
+            <a:pPr algn="ctr"/>
+          </a:p>
+        </p:txBody>
+      </p:sp>
+      <p:sp>
+        <p:nvSpPr>
+          <p:cNvPr id="19" name="sp-3"/>
+          <p:cNvSpPr/>
+          <p:nvPr/>
+        </p:nvSpPr>
+        <p:spPr>
+          <a:xfrm>
+            <a:off x="3036726" y="879697"/>
+            <a:ext cx="833398" cy="136176"/>
+          </a:xfrm>
+          <a:prstGeom prst="roundRect">
+            <a:avLst>
+              <a:gd name="adj" fmla="val 8000"/>
+            </a:avLst>
+          </a:prstGeom>
+          <a:solidFill>
+            <a:srgbClr val="FFFFFF"/>
+          </a:solidFill>
+          <a:ln w="5447">
+            <a:solidFill>
+              <a:srgbClr val="9A9A9A"/>
+            </a:solidFill>
+          </a:ln>
+        </p:spPr>
+        <p:txBody>
+          <a:bodyPr rtlCol="0" anchor="ctr"/>
+          <a:lstStyle/>
+          <a:p>
+            <a:pPr algn="ctr"/>
+          </a:p>
+        </p:txBody>
+      </p:sp>
+      <p:sp>
+        <p:nvSpPr>
+          <p:cNvPr id="20" name="Text SPAN"/>
+          <p:cNvSpPr txBox="1"/>
+          <p:nvPr/>
+        </p:nvSpPr>
+        <p:spPr>
+          <a:xfrm>
+            <a:off x="3077579" y="899634"/>
+            <a:ext cx="429635" cy="87153"/>
+          </a:xfrm>
+          <a:prstGeom prst="rect">
+            <a:avLst/>
+          </a:prstGeom>
+          <a:noFill/>
+        </p:spPr>
+        <p:txBody>
+          <a:bodyPr wrap="none" lIns="0" rIns="0" tIns="0" bIns="0" anchor="t">
+            <a:noAutofit/>
+          </a:bodyPr>
+          <a:lstStyle/>
+          <a:p>
+            <a:pPr algn="l"/>
+            <a:r>
+              <a:rPr sz="600" b="0" i="0" u="none" lang="de-DE">
+                <a:solidFill>
+                  <a:srgbClr val="1A1A1A"/>
+                </a:solidFill>
+                <a:latin typeface="Arial"/>
+              </a:rPr>
+              <a:t>Worst Case</a:t>
+            </a:r>
+          </a:p>
+        </p:txBody>
+      </p:sp>
+      <p:sp>
+        <p:nvSpPr>
+          <p:cNvPr id="21" name="Form"/>
+          <p:cNvSpPr/>
+          <p:nvPr/>
+        </p:nvSpPr>
+        <p:spPr>
+          <a:xfrm>
+            <a:off x="3774801" y="936891"/>
+            <a:ext cx="43576" cy="27236"/>
+          </a:xfrm>
+          <a:custGeom>
+            <a:avLst/>
+            <a:gdLst/>
+            <a:ahLst/>
+            <a:cxnLst/>
+            <a:rect l="l" t="t" r="r" b="b"/>
+            <a:pathLst>
+              <a:path w="43576" h="27236">
+                <a:moveTo>
+                  <a:pt x="0" y="0"/>
+                </a:moveTo>
+                <a:lnTo>
+                  <a:pt x="43576" y="0"/>
+                </a:lnTo>
+                <a:lnTo>
+                  <a:pt x="21788" y="27236"/>
+                </a:lnTo>
+                <a:close/>
+              </a:path>
+            </a:pathLst>
+          </a:custGeom>
+          <a:solidFill>
+            <a:srgbClr val="3A3F44"/>
+          </a:solidFill>
+          <a:ln>
+            <a:noFill/>
+          </a:ln>
+        </p:spPr>
+        <p:txBody>
+          <a:bodyPr rtlCol="0" anchor="ctr"/>
+          <a:lstStyle/>
+          <a:p>
+            <a:pPr algn="ctr"/>
+          </a:p>
+        </p:txBody>
+      </p:sp>
+      <p:sp>
+        <p:nvSpPr>
+          <p:cNvPr id="22" name="Text l-p0"/>
+          <p:cNvSpPr txBox="1"/>
+          <p:nvPr/>
+        </p:nvSpPr>
+        <p:spPr>
+          <a:xfrm>
+            <a:off x="87153" y="1063045"/>
+            <a:ext cx="469382" cy="87153"/>
+          </a:xfrm>
+          <a:prstGeom prst="rect">
+            <a:avLst/>
+          </a:prstGeom>
+          <a:noFill/>
+        </p:spPr>
+        <p:txBody>
+          <a:bodyPr wrap="none" lIns="0" rIns="0" tIns="0" bIns="0" anchor="t">
+            <a:noAutofit/>
+          </a:bodyPr>
+          <a:lstStyle/>
+          <a:p>
+            <a:pPr algn="l"/>
+            <a:r>
+              <a:rPr sz="600" b="0" i="0" u="none" lang="de-DE">
+                <a:solidFill>
+                  <a:srgbClr val="1A1A1A"/>
+                </a:solidFill>
+                <a:latin typeface="Arial"/>
+              </a:rPr>
+              <a:t>Inflationsrate</a:t>
+            </a:r>
+          </a:p>
+        </p:txBody>
+      </p:sp>
+      <p:sp>
+        <p:nvSpPr>
+          <p:cNvPr id="23" name="p0-0"/>
+          <p:cNvSpPr/>
+          <p:nvPr/>
+        </p:nvSpPr>
+        <p:spPr>
+          <a:xfrm>
+            <a:off x="1004979" y="1043109"/>
+            <a:ext cx="1040385" cy="136176"/>
+          </a:xfrm>
+          <a:prstGeom prst="roundRect">
+            <a:avLst>
+              <a:gd name="adj" fmla="val 8000"/>
+            </a:avLst>
+          </a:prstGeom>
+          <a:solidFill>
+            <a:srgbClr val="FFFFFF"/>
+          </a:solidFill>
+          <a:ln w="5447">
+            <a:solidFill>
+              <a:srgbClr val="9A9A9A"/>
+            </a:solidFill>
+          </a:ln>
+        </p:spPr>
+        <p:txBody>
+          <a:bodyPr rtlCol="0" anchor="ctr"/>
+          <a:lstStyle/>
+          <a:p>
+            <a:pPr algn="ctr"/>
+          </a:p>
+        </p:txBody>
+      </p:sp>
+      <p:sp>
+        <p:nvSpPr>
+          <p:cNvPr id="24" name="Text p0-0"/>
+          <p:cNvSpPr txBox="1"/>
+          <p:nvPr/>
+        </p:nvSpPr>
+        <p:spPr>
+          <a:xfrm>
+            <a:off x="1865782" y="1063045"/>
+            <a:ext cx="138729" cy="87153"/>
+          </a:xfrm>
+          <a:prstGeom prst="rect">
+            <a:avLst/>
+          </a:prstGeom>
+          <a:noFill/>
+        </p:spPr>
+        <p:txBody>
+          <a:bodyPr wrap="none" lIns="0" rIns="0" tIns="0" bIns="0" anchor="t">
+            <a:noAutofit/>
+          </a:bodyPr>
+          <a:lstStyle/>
+          <a:p>
+            <a:pPr algn="r"/>
+            <a:r>
+              <a:rPr sz="600" b="0" i="0" u="none" lang="de-DE">
+                <a:solidFill>
+                  <a:srgbClr val="1A1A1A"/>
+                </a:solidFill>
+                <a:latin typeface="Arial"/>
+              </a:rPr>
+              <a:t>1,2</a:t>
+            </a:r>
+          </a:p>
+        </p:txBody>
+      </p:sp>
+      <p:sp>
+        <p:nvSpPr>
+          <p:cNvPr id="25" name="p0-1"/>
+          <p:cNvSpPr/>
+          <p:nvPr/>
+        </p:nvSpPr>
+        <p:spPr>
+          <a:xfrm>
+            <a:off x="2159752" y="1043109"/>
+            <a:ext cx="833398" cy="136176"/>
+          </a:xfrm>
+          <a:prstGeom prst="roundRect">
+            <a:avLst>
+              <a:gd name="adj" fmla="val 8000"/>
+            </a:avLst>
+          </a:prstGeom>
+          <a:solidFill>
+            <a:srgbClr val="FFFFFF"/>
+          </a:solidFill>
+          <a:ln w="5447">
+            <a:solidFill>
+              <a:srgbClr val="9A9A9A"/>
+            </a:solidFill>
+          </a:ln>
+        </p:spPr>
+        <p:txBody>
+          <a:bodyPr rtlCol="0" anchor="ctr"/>
+          <a:lstStyle/>
+          <a:p>
+            <a:pPr algn="ctr"/>
+          </a:p>
+        </p:txBody>
+      </p:sp>
+      <p:sp>
+        <p:nvSpPr>
+          <p:cNvPr id="26" name="p0-2"/>
+          <p:cNvSpPr/>
+          <p:nvPr/>
+        </p:nvSpPr>
+        <p:spPr>
+          <a:xfrm>
+            <a:off x="3036726" y="1043109"/>
+            <a:ext cx="833398" cy="136176"/>
+          </a:xfrm>
+          <a:prstGeom prst="roundRect">
+            <a:avLst>
+              <a:gd name="adj" fmla="val 8000"/>
+            </a:avLst>
+          </a:prstGeom>
+          <a:solidFill>
+            <a:srgbClr val="FFFFFF"/>
+          </a:solidFill>
+          <a:ln w="5447">
+            <a:solidFill>
+              <a:srgbClr val="9A9A9A"/>
+            </a:solidFill>
+          </a:ln>
+        </p:spPr>
+        <p:txBody>
+          <a:bodyPr rtlCol="0" anchor="ctr"/>
+          <a:lstStyle/>
+          <a:p>
+            <a:pPr algn="ctr"/>
+          </a:p>
+        </p:txBody>
+      </p:sp>
+      <p:sp>
+        <p:nvSpPr>
+          <p:cNvPr id="27" name="Text l-p1"/>
+          <p:cNvSpPr txBox="1"/>
+          <p:nvPr/>
+        </p:nvSpPr>
+        <p:spPr>
+          <a:xfrm>
+            <a:off x="87153" y="1226456"/>
+            <a:ext cx="753054" cy="87153"/>
+          </a:xfrm>
+          <a:prstGeom prst="rect">
+            <a:avLst/>
+          </a:prstGeom>
+          <a:noFill/>
+        </p:spPr>
+        <p:txBody>
+          <a:bodyPr wrap="none" lIns="0" rIns="0" tIns="0" bIns="0" anchor="t">
+            <a:noAutofit/>
+          </a:bodyPr>
+          <a:lstStyle/>
+          <a:p>
+            <a:pPr algn="l"/>
+            <a:r>
+              <a:rPr sz="600" b="0" i="0" u="none" lang="de-DE">
+                <a:solidFill>
+                  <a:srgbClr val="1A1A1A"/>
+                </a:solidFill>
+                <a:latin typeface="Arial"/>
+              </a:rPr>
+              <a:t>Wirtschaftswachstum</a:t>
+            </a:r>
+          </a:p>
+        </p:txBody>
+      </p:sp>
+      <p:sp>
+        <p:nvSpPr>
+          <p:cNvPr id="28" name="p1-0"/>
+          <p:cNvSpPr/>
+          <p:nvPr/>
+        </p:nvSpPr>
+        <p:spPr>
+          <a:xfrm>
+            <a:off x="1004979" y="1206520"/>
+            <a:ext cx="1040385" cy="136176"/>
+          </a:xfrm>
+          <a:prstGeom prst="roundRect">
+            <a:avLst>
+              <a:gd name="adj" fmla="val 8000"/>
+            </a:avLst>
+          </a:prstGeom>
+          <a:solidFill>
+            <a:srgbClr val="FFFFFF"/>
+          </a:solidFill>
+          <a:ln w="5447">
+            <a:solidFill>
+              <a:srgbClr val="9A9A9A"/>
+            </a:solidFill>
+          </a:ln>
+        </p:spPr>
+        <p:txBody>
+          <a:bodyPr rtlCol="0" anchor="ctr"/>
+          <a:lstStyle/>
+          <a:p>
+            <a:pPr algn="ctr"/>
+          </a:p>
+        </p:txBody>
+      </p:sp>
+      <p:sp>
+        <p:nvSpPr>
+          <p:cNvPr id="29" name="Text p1-0"/>
+          <p:cNvSpPr txBox="1"/>
+          <p:nvPr/>
+        </p:nvSpPr>
+        <p:spPr>
+          <a:xfrm>
+            <a:off x="1865782" y="1226456"/>
+            <a:ext cx="138729" cy="87153"/>
+          </a:xfrm>
+          <a:prstGeom prst="rect">
+            <a:avLst/>
+          </a:prstGeom>
+          <a:noFill/>
+        </p:spPr>
+        <p:txBody>
+          <a:bodyPr wrap="none" lIns="0" rIns="0" tIns="0" bIns="0" anchor="t">
+            <a:noAutofit/>
+          </a:bodyPr>
+          <a:lstStyle/>
+          <a:p>
+            <a:pPr algn="r"/>
+            <a:r>
+              <a:rPr sz="600" b="0" i="0" u="none" lang="de-DE">
+                <a:solidFill>
+                  <a:srgbClr val="1A1A1A"/>
+                </a:solidFill>
+                <a:latin typeface="Arial"/>
+              </a:rPr>
+              <a:t>2,5</a:t>
+            </a:r>
+          </a:p>
+        </p:txBody>
+      </p:sp>
+      <p:sp>
+        <p:nvSpPr>
+          <p:cNvPr id="30" name="p1-1"/>
+          <p:cNvSpPr/>
+          <p:nvPr/>
+        </p:nvSpPr>
+        <p:spPr>
+          <a:xfrm>
+            <a:off x="2159752" y="1206520"/>
+            <a:ext cx="833398" cy="136176"/>
+          </a:xfrm>
+          <a:prstGeom prst="roundRect">
+            <a:avLst>
+              <a:gd name="adj" fmla="val 8000"/>
+            </a:avLst>
+          </a:prstGeom>
+          <a:solidFill>
+            <a:srgbClr val="FFFFFF"/>
+          </a:solidFill>
+          <a:ln w="5447">
+            <a:solidFill>
+              <a:srgbClr val="9A9A9A"/>
+            </a:solidFill>
+          </a:ln>
+        </p:spPr>
+        <p:txBody>
+          <a:bodyPr rtlCol="0" anchor="ctr"/>
+          <a:lstStyle/>
+          <a:p>
+            <a:pPr algn="ctr"/>
+          </a:p>
+        </p:txBody>
+      </p:sp>
+      <p:sp>
+        <p:nvSpPr>
+          <p:cNvPr id="31" name="p1-2"/>
+          <p:cNvSpPr/>
+          <p:nvPr/>
+        </p:nvSpPr>
+        <p:spPr>
+          <a:xfrm>
+            <a:off x="3036726" y="1206520"/>
+            <a:ext cx="833398" cy="136176"/>
+          </a:xfrm>
+          <a:prstGeom prst="roundRect">
+            <a:avLst>
+              <a:gd name="adj" fmla="val 8000"/>
+            </a:avLst>
+          </a:prstGeom>
+          <a:solidFill>
+            <a:srgbClr val="FFFFFF"/>
+          </a:solidFill>
+          <a:ln w="5447">
+            <a:solidFill>
+              <a:srgbClr val="9A9A9A"/>
+            </a:solidFill>
+          </a:ln>
+        </p:spPr>
+        <p:txBody>
+          <a:bodyPr rtlCol="0" anchor="ctr"/>
+          <a:lstStyle/>
+          <a:p>
+            <a:pPr algn="ctr"/>
+          </a:p>
+        </p:txBody>
+      </p:sp>
+      <p:sp>
+        <p:nvSpPr>
+          <p:cNvPr id="32" name="Text l-p2"/>
+          <p:cNvSpPr txBox="1"/>
+          <p:nvPr/>
+        </p:nvSpPr>
+        <p:spPr>
+          <a:xfrm>
+            <a:off x="87153" y="1389867"/>
+            <a:ext cx="859356" cy="87153"/>
+          </a:xfrm>
+          <a:prstGeom prst="rect">
+            <a:avLst/>
+          </a:prstGeom>
+          <a:noFill/>
+        </p:spPr>
+        <p:txBody>
+          <a:bodyPr wrap="none" lIns="0" rIns="0" tIns="0" bIns="0" anchor="t">
+            <a:noAutofit/>
+          </a:bodyPr>
+          <a:lstStyle/>
+          <a:p>
+            <a:pPr algn="l"/>
+            <a:r>
+              <a:rPr sz="600" b="0" i="0" u="none" lang="de-DE">
+                <a:solidFill>
+                  <a:srgbClr val="1A1A1A"/>
+                </a:solidFill>
+                <a:latin typeface="Arial"/>
+              </a:rPr>
+              <a:t>Personalsteigerungsrate</a:t>
+            </a:r>
+          </a:p>
+        </p:txBody>
+      </p:sp>
+      <p:sp>
+        <p:nvSpPr>
+          <p:cNvPr id="33" name="p2-0"/>
+          <p:cNvSpPr/>
+          <p:nvPr/>
+        </p:nvSpPr>
+        <p:spPr>
+          <a:xfrm>
+            <a:off x="1004979" y="1369931"/>
+            <a:ext cx="1040385" cy="136176"/>
+          </a:xfrm>
+          <a:prstGeom prst="roundRect">
+            <a:avLst>
+              <a:gd name="adj" fmla="val 8000"/>
+            </a:avLst>
+          </a:prstGeom>
+          <a:solidFill>
+            <a:srgbClr val="FFFFFF"/>
+          </a:solidFill>
+          <a:ln w="5447">
+            <a:solidFill>
+              <a:srgbClr val="9A9A9A"/>
+            </a:solidFill>
+          </a:ln>
+        </p:spPr>
+        <p:txBody>
+          <a:bodyPr rtlCol="0" anchor="ctr"/>
+          <a:lstStyle/>
+          <a:p>
+            <a:pPr algn="ctr"/>
+          </a:p>
+        </p:txBody>
+      </p:sp>
+      <p:sp>
+        <p:nvSpPr>
+          <p:cNvPr id="34" name="Text p2-0"/>
+          <p:cNvSpPr txBox="1"/>
+          <p:nvPr/>
+        </p:nvSpPr>
+        <p:spPr>
+          <a:xfrm>
+            <a:off x="1865782" y="1389867"/>
+            <a:ext cx="138729" cy="87153"/>
+          </a:xfrm>
+          <a:prstGeom prst="rect">
+            <a:avLst/>
+          </a:prstGeom>
+          <a:noFill/>
+        </p:spPr>
+        <p:txBody>
+          <a:bodyPr wrap="none" lIns="0" rIns="0" tIns="0" bIns="0" anchor="t">
+            <a:noAutofit/>
+          </a:bodyPr>
+          <a:lstStyle/>
+          <a:p>
+            <a:pPr algn="r"/>
+            <a:r>
+              <a:rPr sz="600" b="0" i="0" u="none" lang="de-DE">
+                <a:solidFill>
+                  <a:srgbClr val="1A1A1A"/>
+                </a:solidFill>
+                <a:latin typeface="Arial"/>
+              </a:rPr>
+              <a:t>3,5</a:t>
+            </a:r>
+          </a:p>
+        </p:txBody>
+      </p:sp>
+      <p:sp>
+        <p:nvSpPr>
+          <p:cNvPr id="35" name="p2-1"/>
+          <p:cNvSpPr/>
+          <p:nvPr/>
+        </p:nvSpPr>
+        <p:spPr>
+          <a:xfrm>
+            <a:off x="2159752" y="1369931"/>
+            <a:ext cx="833398" cy="136176"/>
+          </a:xfrm>
+          <a:prstGeom prst="roundRect">
+            <a:avLst>
+              <a:gd name="adj" fmla="val 8000"/>
+            </a:avLst>
+          </a:prstGeom>
+          <a:solidFill>
+            <a:srgbClr val="FFFFFF"/>
+          </a:solidFill>
+          <a:ln w="5447">
+            <a:solidFill>
+              <a:srgbClr val="9A9A9A"/>
+            </a:solidFill>
+          </a:ln>
+        </p:spPr>
+        <p:txBody>
+          <a:bodyPr rtlCol="0" anchor="ctr"/>
+          <a:lstStyle/>
+          <a:p>
+            <a:pPr algn="ctr"/>
+          </a:p>
+        </p:txBody>
+      </p:sp>
+      <p:sp>
+        <p:nvSpPr>
+          <p:cNvPr id="36" name="p2-2"/>
+          <p:cNvSpPr/>
+          <p:nvPr/>
+        </p:nvSpPr>
+        <p:spPr>
+          <a:xfrm>
+            <a:off x="3036726" y="1369931"/>
+            <a:ext cx="833398" cy="136176"/>
+          </a:xfrm>
+          <a:prstGeom prst="roundRect">
+            <a:avLst>
+              <a:gd name="adj" fmla="val 8000"/>
+            </a:avLst>
+          </a:prstGeom>
+          <a:solidFill>
+            <a:srgbClr val="FFFFFF"/>
+          </a:solidFill>
+          <a:ln w="5447">
+            <a:solidFill>
+              <a:srgbClr val="9A9A9A"/>
+            </a:solidFill>
+          </a:ln>
+        </p:spPr>
+        <p:txBody>
+          <a:bodyPr rtlCol="0" anchor="ctr"/>
+          <a:lstStyle/>
+          <a:p>
+            <a:pPr algn="ctr"/>
+          </a:p>
+        </p:txBody>
+      </p:sp>
+      <p:sp>
+        <p:nvSpPr>
+          <p:cNvPr id="37" name="Text l-p3"/>
+          <p:cNvSpPr txBox="1"/>
+          <p:nvPr/>
+        </p:nvSpPr>
+        <p:spPr>
+          <a:xfrm>
+            <a:off x="87153" y="1553279"/>
+            <a:ext cx="634410" cy="87153"/>
+          </a:xfrm>
+          <a:prstGeom prst="rect">
+            <a:avLst/>
+          </a:prstGeom>
+          <a:noFill/>
+        </p:spPr>
+        <p:txBody>
+          <a:bodyPr wrap="none" lIns="0" rIns="0" tIns="0" bIns="0" anchor="t">
+            <a:noAutofit/>
+          </a:bodyPr>
+          <a:lstStyle/>
+          <a:p>
+            <a:pPr algn="l"/>
+            <a:r>
+              <a:rPr sz="600" b="0" i="0" u="none" lang="de-DE">
+                <a:solidFill>
+                  <a:srgbClr val="1A1A1A"/>
+                </a:solidFill>
+                <a:latin typeface="Arial"/>
+              </a:rPr>
+              <a:t>Umsatzwachstum</a:t>
+            </a:r>
+          </a:p>
+        </p:txBody>
+      </p:sp>
+      <p:sp>
+        <p:nvSpPr>
+          <p:cNvPr id="38" name="p3-0"/>
+          <p:cNvSpPr/>
+          <p:nvPr/>
+        </p:nvSpPr>
+        <p:spPr>
+          <a:xfrm>
+            <a:off x="1004979" y="1533343"/>
+            <a:ext cx="1040385" cy="136176"/>
+          </a:xfrm>
+          <a:prstGeom prst="roundRect">
+            <a:avLst>
+              <a:gd name="adj" fmla="val 8000"/>
+            </a:avLst>
+          </a:prstGeom>
+          <a:solidFill>
+            <a:srgbClr val="FFFFFF"/>
+          </a:solidFill>
+          <a:ln w="5447">
+            <a:solidFill>
+              <a:srgbClr val="9A9A9A"/>
+            </a:solidFill>
+          </a:ln>
+        </p:spPr>
+        <p:txBody>
+          <a:bodyPr rtlCol="0" anchor="ctr"/>
+          <a:lstStyle/>
+          <a:p>
+            <a:pPr algn="ctr"/>
+          </a:p>
+        </p:txBody>
+      </p:sp>
+      <p:sp>
+        <p:nvSpPr>
+          <p:cNvPr id="39" name="Text p3-0"/>
+          <p:cNvSpPr txBox="1"/>
+          <p:nvPr/>
+        </p:nvSpPr>
+        <p:spPr>
+          <a:xfrm>
+            <a:off x="1865782" y="1553279"/>
+            <a:ext cx="138729" cy="87153"/>
+          </a:xfrm>
+          <a:prstGeom prst="rect">
+            <a:avLst/>
+          </a:prstGeom>
+          <a:noFill/>
+        </p:spPr>
+        <p:txBody>
+          <a:bodyPr wrap="none" lIns="0" rIns="0" tIns="0" bIns="0" anchor="t">
+            <a:noAutofit/>
+          </a:bodyPr>
+          <a:lstStyle/>
+          <a:p>
+            <a:pPr algn="r"/>
+            <a:r>
+              <a:rPr sz="600" b="0" i="0" u="none" lang="de-DE">
+                <a:solidFill>
+                  <a:srgbClr val="1A1A1A"/>
+                </a:solidFill>
+                <a:latin typeface="Arial"/>
+              </a:rPr>
+              <a:t>4,5</a:t>
+            </a:r>
+          </a:p>
+        </p:txBody>
+      </p:sp>
+      <p:sp>
+        <p:nvSpPr>
+          <p:cNvPr id="40" name="p3-1"/>
+          <p:cNvSpPr/>
+          <p:nvPr/>
+        </p:nvSpPr>
+        <p:spPr>
+          <a:xfrm>
+            <a:off x="2159752" y="1533343"/>
+            <a:ext cx="833398" cy="136176"/>
+          </a:xfrm>
+          <a:prstGeom prst="roundRect">
+            <a:avLst>
+              <a:gd name="adj" fmla="val 8000"/>
+            </a:avLst>
+          </a:prstGeom>
+          <a:solidFill>
+            <a:srgbClr val="FFFFFF"/>
+          </a:solidFill>
+          <a:ln w="5447">
+            <a:solidFill>
+              <a:srgbClr val="9A9A9A"/>
+            </a:solidFill>
+          </a:ln>
+        </p:spPr>
+        <p:txBody>
+          <a:bodyPr rtlCol="0" anchor="ctr"/>
+          <a:lstStyle/>
+          <a:p>
+            <a:pPr algn="ctr"/>
+          </a:p>
+        </p:txBody>
+      </p:sp>
+      <p:sp>
+        <p:nvSpPr>
+          <p:cNvPr id="41" name="p3-2"/>
+          <p:cNvSpPr/>
+          <p:nvPr/>
+        </p:nvSpPr>
+        <p:spPr>
+          <a:xfrm>
+            <a:off x="3036726" y="1533343"/>
+            <a:ext cx="833398" cy="136176"/>
+          </a:xfrm>
+          <a:prstGeom prst="roundRect">
+            <a:avLst>
+              <a:gd name="adj" fmla="val 8000"/>
+            </a:avLst>
+          </a:prstGeom>
+          <a:solidFill>
+            <a:srgbClr val="FFFFFF"/>
+          </a:solidFill>
+          <a:ln w="5447">
+            <a:solidFill>
+              <a:srgbClr val="9A9A9A"/>
+            </a:solidFill>
+          </a:ln>
+        </p:spPr>
+        <p:txBody>
+          <a:bodyPr rtlCol="0" anchor="ctr"/>
+          <a:lstStyle/>
+          <a:p>
+            <a:pPr algn="ctr"/>
+          </a:p>
+        </p:txBody>
+      </p:sp>
+      <p:sp>
+        <p:nvSpPr>
+          <p:cNvPr id="42" name="band-teilplaene"/>
+          <p:cNvSpPr/>
+          <p:nvPr/>
+        </p:nvSpPr>
+        <p:spPr>
+          <a:xfrm>
+            <a:off x="87153" y="1770289"/>
+            <a:ext cx="3785695" cy="141623"/>
+          </a:xfrm>
+          <a:prstGeom prst="rect">
+            <a:avLst/>
+          </a:prstGeom>
+          <a:solidFill>
+            <a:srgbClr val="F6F6F6"/>
+          </a:solidFill>
+          <a:ln>
+            <a:noFill/>
+          </a:ln>
+        </p:spPr>
+        <p:txBody>
+          <a:bodyPr rtlCol="0" anchor="ctr"/>
+          <a:lstStyle/>
+          <a:p>
+            <a:pPr algn="ctr"/>
+          </a:p>
+        </p:txBody>
+      </p:sp>
+      <p:sp>
+        <p:nvSpPr>
+          <p:cNvPr id="43" name="Text band-teilplaene"/>
+          <p:cNvSpPr txBox="1"/>
+          <p:nvPr/>
+        </p:nvSpPr>
+        <p:spPr>
+          <a:xfrm>
+            <a:off x="130729" y="1792949"/>
+            <a:ext cx="1584068" cy="87153"/>
+          </a:xfrm>
+          <a:prstGeom prst="rect">
+            <a:avLst/>
+          </a:prstGeom>
+          <a:noFill/>
+        </p:spPr>
+        <p:txBody>
+          <a:bodyPr wrap="none" lIns="0" rIns="0" tIns="0" bIns="0" anchor="t">
+            <a:noAutofit/>
+          </a:bodyPr>
+          <a:lstStyle/>
+          <a:p>
+            <a:pPr algn="l"/>
+            <a:r>
+              <a:rPr sz="600" b="1" i="0" u="none" lang="de-DE" spc="12">
+                <a:solidFill>
+                  <a:srgbClr val="3A3F44"/>
+                </a:solidFill>
+                <a:latin typeface="Arial"/>
+              </a:rPr>
+              <a:t>PLANUNGSPRÄMISSEN FÜR TEILPLÄNE</a:t>
+            </a:r>
+          </a:p>
+        </p:txBody>
+      </p:sp>
+      <p:sp>
+        <p:nvSpPr>
+          <p:cNvPr id="44" name="Text mk-label"/>
+          <p:cNvSpPr txBox="1"/>
+          <p:nvPr/>
+        </p:nvSpPr>
+        <p:spPr>
+          <a:xfrm>
+            <a:off x="87153" y="1989042"/>
+            <a:ext cx="291332" cy="87153"/>
+          </a:xfrm>
+          <a:prstGeom prst="rect">
+            <a:avLst/>
+          </a:prstGeom>
+          <a:noFill/>
+        </p:spPr>
+        <p:txBody>
+          <a:bodyPr wrap="none" lIns="0" rIns="0" tIns="0" bIns="0" anchor="t">
+            <a:noAutofit/>
+          </a:bodyPr>
+          <a:lstStyle/>
+          <a:p>
+            <a:pPr algn="l"/>
+            <a:r>
+              <a:rPr sz="600" b="0" i="0" u="none" lang="de-DE">
+                <a:solidFill>
+                  <a:srgbClr val="1A1A1A"/>
+                </a:solidFill>
+                <a:latin typeface="Arial"/>
+              </a:rPr>
+              <a:t>Teilplan</a:t>
+            </a:r>
+          </a:p>
+        </p:txBody>
+      </p:sp>
+      <p:sp>
+        <p:nvSpPr>
+          <p:cNvPr id="45" name="f-teilplan"/>
+          <p:cNvSpPr/>
+          <p:nvPr/>
+        </p:nvSpPr>
+        <p:spPr>
+          <a:xfrm>
+            <a:off x="1004979" y="1969106"/>
+            <a:ext cx="1040385" cy="136176"/>
+          </a:xfrm>
+          <a:prstGeom prst="roundRect">
+            <a:avLst>
+              <a:gd name="adj" fmla="val 8000"/>
+            </a:avLst>
+          </a:prstGeom>
+          <a:solidFill>
+            <a:srgbClr val="FFFFFF"/>
+          </a:solidFill>
+          <a:ln w="5447">
+            <a:solidFill>
+              <a:srgbClr val="9A9A9A"/>
+            </a:solidFill>
+          </a:ln>
+        </p:spPr>
+        <p:txBody>
+          <a:bodyPr rtlCol="0" anchor="ctr"/>
+          <a:lstStyle/>
+          <a:p>
+            <a:pPr algn="ctr"/>
+          </a:p>
+        </p:txBody>
+      </p:sp>
+      <p:sp>
+        <p:nvSpPr>
+          <p:cNvPr id="46" name="Text SPAN"/>
+          <p:cNvSpPr txBox="1"/>
+          <p:nvPr/>
+        </p:nvSpPr>
+        <p:spPr>
+          <a:xfrm>
+            <a:off x="1045832" y="1989042"/>
+            <a:ext cx="537300" cy="87153"/>
+          </a:xfrm>
+          <a:prstGeom prst="rect">
+            <a:avLst/>
+          </a:prstGeom>
+          <a:noFill/>
+        </p:spPr>
+        <p:txBody>
+          <a:bodyPr wrap="none" lIns="0" rIns="0" tIns="0" bIns="0" anchor="t">
+            <a:noAutofit/>
+          </a:bodyPr>
+          <a:lstStyle/>
+          <a:p>
+            <a:pPr algn="l"/>
+            <a:r>
+              <a:rPr sz="600" b="0" i="0" u="none" lang="de-DE">
+                <a:solidFill>
+                  <a:srgbClr val="1A1A1A"/>
+                </a:solidFill>
+                <a:latin typeface="Arial"/>
+              </a:rPr>
+              <a:t>Absatzplanung</a:t>
+            </a:r>
+          </a:p>
+        </p:txBody>
+      </p:sp>
+      <p:sp>
+        <p:nvSpPr>
+          <p:cNvPr id="47" name="Form"/>
+          <p:cNvSpPr/>
+          <p:nvPr/>
+        </p:nvSpPr>
+        <p:spPr>
+          <a:xfrm>
+            <a:off x="1950041" y="2026300"/>
             <a:ext cx="43577" cy="27235"/>
           </a:xfrm>
           <a:custGeom>
@@ -3549,14 +4696,49 @@
       </p:sp>
       <p:sp>
         <p:nvSpPr>
-          <p:cNvPr id="15" name="sp-2"/>
+          <p:cNvPr id="48" name="Text mk-label"/>
+          <p:cNvSpPr txBox="1"/>
+          <p:nvPr/>
+        </p:nvSpPr>
+        <p:spPr>
+          <a:xfrm>
+            <a:off x="87153" y="2152453"/>
+            <a:ext cx="643091" cy="87153"/>
+          </a:xfrm>
+          <a:prstGeom prst="rect">
+            <a:avLst/>
+          </a:prstGeom>
+          <a:noFill/>
+        </p:spPr>
+        <p:txBody>
+          <a:bodyPr wrap="none" lIns="0" rIns="0" tIns="0" bIns="0" anchor="t">
+            <a:noAutofit/>
+          </a:bodyPr>
+          <a:lstStyle/>
+          <a:p>
+            <a:pPr algn="l"/>
+            <a:r>
+              <a:rPr sz="600" b="0" i="0" u="none" lang="de-DE">
+                <a:solidFill>
+                  <a:srgbClr val="1A1A1A"/>
+                </a:solidFill>
+                <a:latin typeface="Arial"/>
+              </a:rPr>
+              <a:t>Planungszeitraum</a:t>
+            </a:r>
+          </a:p>
+        </p:txBody>
+      </p:sp>
+      <p:sp>
+        <p:nvSpPr>
+          <p:cNvPr id="49" name="f-von"/>
           <p:cNvSpPr/>
           <p:nvPr/>
         </p:nvSpPr>
         <p:spPr>
           <a:xfrm>
-            <a:off x="2159752" y="661816"/>
-            <a:ext cx="833398" cy="136176"/>
+            <a:off x="1004979" y="2132517"/>
+            <a:ext cx="436019" cy="136176"/>
           </a:xfrm>
           <a:prstGeom prst="roundRect">
             <a:avLst>
@@ -3582,14 +4764,14 @@
       </p:sp>
       <p:sp>
         <p:nvSpPr>
-          <p:cNvPr id="16" name="Text SPAN"/>
+          <p:cNvPr id="50" name="Text f-von"/>
           <p:cNvSpPr txBox="1"/>
           <p:nvPr/>
         </p:nvSpPr>
         <p:spPr>
           <a:xfrm>
-            <a:off x="2200605" y="681752"/>
-            <a:ext cx="374654" cy="87153"/>
+            <a:off x="1015788" y="2152453"/>
+            <a:ext cx="414401" cy="87153"/>
           </a:xfrm>
           <a:prstGeom prst="rect">
             <a:avLst/>
@@ -3602,7 +4784,7 @@
           </a:bodyPr>
           <a:lstStyle/>
           <a:p>
-            <a:pPr algn="l"/>
+            <a:pPr algn="ctr"/>
             <a:r>
               <a:rPr sz="600" b="0" i="0" u="none" lang="de-DE">
                 <a:solidFill>
@@ -3610,21 +4792,227 @@
                 </a:solidFill>
                 <a:latin typeface="Arial"/>
               </a:rPr>
-              <a:t>Variante 1</a:t>
-            </a:r>
-          </a:p>
-        </p:txBody>
-      </p:sp>
-      <p:sp>
-        <p:nvSpPr>
-          <p:cNvPr id="17" name="Form"/>
+              <a:t>14.09.2027</a:t>
+            </a:r>
+          </a:p>
+        </p:txBody>
+      </p:sp>
+      <p:sp>
+        <p:nvSpPr>
+          <p:cNvPr id="51" name="Text mk-zwischen"/>
+          <p:cNvSpPr txBox="1"/>
+          <p:nvPr/>
+        </p:nvSpPr>
+        <p:spPr>
+          <a:xfrm>
+            <a:off x="1476404" y="2152453"/>
+            <a:ext cx="130218" cy="87153"/>
+          </a:xfrm>
+          <a:prstGeom prst="rect">
+            <a:avLst/>
+          </a:prstGeom>
+          <a:noFill/>
+        </p:spPr>
+        <p:txBody>
+          <a:bodyPr wrap="none" lIns="0" rIns="0" tIns="0" bIns="0" anchor="t">
+            <a:noAutofit/>
+          </a:bodyPr>
+          <a:lstStyle/>
+          <a:p>
+            <a:pPr algn="l"/>
+            <a:r>
+              <a:rPr sz="600" b="0" i="0" u="none" lang="de-DE">
+                <a:solidFill>
+                  <a:srgbClr val="4D4D4D"/>
+                </a:solidFill>
+                <a:latin typeface="Arial"/>
+              </a:rPr>
+              <a:t>bis</a:t>
+            </a:r>
+          </a:p>
+        </p:txBody>
+      </p:sp>
+      <p:sp>
+        <p:nvSpPr>
+          <p:cNvPr id="52" name="f-bis"/>
           <p:cNvSpPr/>
           <p:nvPr/>
         </p:nvSpPr>
         <p:spPr>
           <a:xfrm>
-            <a:off x="2897827" y="719010"/>
-            <a:ext cx="43576" cy="27235"/>
+            <a:off x="1609346" y="2132517"/>
+            <a:ext cx="436019" cy="136176"/>
+          </a:xfrm>
+          <a:prstGeom prst="roundRect">
+            <a:avLst>
+              <a:gd name="adj" fmla="val 8000"/>
+            </a:avLst>
+          </a:prstGeom>
+          <a:solidFill>
+            <a:srgbClr val="FFFFFF"/>
+          </a:solidFill>
+          <a:ln w="5447">
+            <a:solidFill>
+              <a:srgbClr val="9A9A9A"/>
+            </a:solidFill>
+          </a:ln>
+        </p:spPr>
+        <p:txBody>
+          <a:bodyPr rtlCol="0" anchor="ctr"/>
+          <a:lstStyle/>
+          <a:p>
+            <a:pPr algn="ctr"/>
+          </a:p>
+        </p:txBody>
+      </p:sp>
+      <p:sp>
+        <p:nvSpPr>
+          <p:cNvPr id="53" name="Text f-bis"/>
+          <p:cNvSpPr txBox="1"/>
+          <p:nvPr/>
+        </p:nvSpPr>
+        <p:spPr>
+          <a:xfrm>
+            <a:off x="1620155" y="2152453"/>
+            <a:ext cx="414401" cy="87153"/>
+          </a:xfrm>
+          <a:prstGeom prst="rect">
+            <a:avLst/>
+          </a:prstGeom>
+          <a:noFill/>
+        </p:spPr>
+        <p:txBody>
+          <a:bodyPr wrap="none" lIns="0" rIns="0" tIns="0" bIns="0" anchor="t">
+            <a:noAutofit/>
+          </a:bodyPr>
+          <a:lstStyle/>
+          <a:p>
+            <a:pPr algn="ctr"/>
+            <a:r>
+              <a:rPr sz="600" b="0" i="0" u="none" lang="de-DE">
+                <a:solidFill>
+                  <a:srgbClr val="1A1A1A"/>
+                </a:solidFill>
+                <a:latin typeface="Arial"/>
+              </a:rPr>
+              <a:t>25.09.2027</a:t>
+            </a:r>
+          </a:p>
+        </p:txBody>
+      </p:sp>
+      <p:sp>
+        <p:nvSpPr>
+          <p:cNvPr id="54" name="Text mk-label"/>
+          <p:cNvSpPr txBox="1"/>
+          <p:nvPr/>
+        </p:nvSpPr>
+        <p:spPr>
+          <a:xfrm>
+            <a:off x="87153" y="2315865"/>
+            <a:ext cx="311077" cy="87153"/>
+          </a:xfrm>
+          <a:prstGeom prst="rect">
+            <a:avLst/>
+          </a:prstGeom>
+          <a:noFill/>
+        </p:spPr>
+        <p:txBody>
+          <a:bodyPr wrap="none" lIns="0" rIns="0" tIns="0" bIns="0" anchor="t">
+            <a:noAutofit/>
+          </a:bodyPr>
+          <a:lstStyle/>
+          <a:p>
+            <a:pPr algn="l"/>
+            <a:r>
+              <a:rPr sz="600" b="0" i="0" u="none" lang="de-DE">
+                <a:solidFill>
+                  <a:srgbClr val="1A1A1A"/>
+                </a:solidFill>
+                <a:latin typeface="Arial"/>
+              </a:rPr>
+              <a:t>Variante</a:t>
+            </a:r>
+          </a:p>
+        </p:txBody>
+      </p:sp>
+      <p:sp>
+        <p:nvSpPr>
+          <p:cNvPr id="55" name="f-variante"/>
+          <p:cNvSpPr/>
+          <p:nvPr/>
+        </p:nvSpPr>
+        <p:spPr>
+          <a:xfrm>
+            <a:off x="1004979" y="2295928"/>
+            <a:ext cx="1040385" cy="136176"/>
+          </a:xfrm>
+          <a:prstGeom prst="roundRect">
+            <a:avLst>
+              <a:gd name="adj" fmla="val 8000"/>
+            </a:avLst>
+          </a:prstGeom>
+          <a:solidFill>
+            <a:srgbClr val="FFFFFF"/>
+          </a:solidFill>
+          <a:ln w="5447">
+            <a:solidFill>
+              <a:srgbClr val="9A9A9A"/>
+            </a:solidFill>
+          </a:ln>
+        </p:spPr>
+        <p:txBody>
+          <a:bodyPr rtlCol="0" anchor="ctr"/>
+          <a:lstStyle/>
+          <a:p>
+            <a:pPr algn="ctr"/>
+          </a:p>
+        </p:txBody>
+      </p:sp>
+      <p:sp>
+        <p:nvSpPr>
+          <p:cNvPr id="56" name="Text SPAN"/>
+          <p:cNvSpPr txBox="1"/>
+          <p:nvPr/>
+        </p:nvSpPr>
+        <p:spPr>
+          <a:xfrm>
+            <a:off x="1045832" y="2315865"/>
+            <a:ext cx="342227" cy="87153"/>
+          </a:xfrm>
+          <a:prstGeom prst="rect">
+            <a:avLst/>
+          </a:prstGeom>
+          <a:noFill/>
+        </p:spPr>
+        <p:txBody>
+          <a:bodyPr wrap="none" lIns="0" rIns="0" tIns="0" bIns="0" anchor="t">
+            <a:noAutofit/>
+          </a:bodyPr>
+          <a:lstStyle/>
+          <a:p>
+            <a:pPr algn="l"/>
+            <a:r>
+              <a:rPr sz="600" b="0" i="0" u="none" lang="de-DE">
+                <a:solidFill>
+                  <a:srgbClr val="1A1A1A"/>
+                </a:solidFill>
+                <a:latin typeface="Arial"/>
+              </a:rPr>
+              <a:t>Standard</a:t>
+            </a:r>
+          </a:p>
+        </p:txBody>
+      </p:sp>
+      <p:sp>
+        <p:nvSpPr>
+          <p:cNvPr id="57" name="Form"/>
+          <p:cNvSpPr/>
+          <p:nvPr/>
+        </p:nvSpPr>
+        <p:spPr>
+          <a:xfrm>
+            <a:off x="1950041" y="2353122"/>
+            <a:ext cx="43577" cy="27236"/>
           </a:xfrm>
           <a:custGeom>
             <a:avLst/>
@@ -3633,15 +5021,15 @@
             <a:cxnLst/>
             <a:rect l="l" t="t" r="r" b="b"/>
             <a:pathLst>
-              <a:path w="43576" h="27235">
+              <a:path w="43577" h="27236">
                 <a:moveTo>
                   <a:pt x="0" y="0"/>
                 </a:moveTo>
                 <a:lnTo>
-                  <a:pt x="43576" y="0"/>
+                  <a:pt x="43577" y="0"/>
                 </a:lnTo>
                 <a:lnTo>
-                  <a:pt x="21788" y="27235"/>
+                  <a:pt x="21788" y="27236"/>
                 </a:lnTo>
                 <a:close/>
               </a:path>
@@ -3662,16 +5050,107 @@
           </a:p>
         </p:txBody>
       </p:sp>
-      <p:sp>
-        <p:nvSpPr>
-          <p:cNvPr id="18" name="sp-3"/>
+      <p:cxnSp>
+        <p:nvCxnSpPr>
+          <p:cNvPr id="58" name="Linie"/>
+          <p:cNvCxnSpPr/>
+          <p:nvPr/>
+        </p:nvCxnSpPr>
+        <p:spPr>
+          <a:xfrm>
+            <a:off x="87153" y="2628198"/>
+            <a:ext cx="1960935" cy="0"/>
+          </a:xfrm>
+          <a:prstGeom prst="line">
+            <a:avLst/>
+          </a:prstGeom>
+          <a:ln w="5447">
+            <a:solidFill>
+              <a:srgbClr val="9A9A9A"/>
+            </a:solidFill>
+          </a:ln>
+        </p:spPr>
+      </p:cxnSp>
+      <p:sp>
+        <p:nvSpPr>
+          <p:cNvPr id="59" name="Text mk-gruppenkopf"/>
+          <p:cNvSpPr txBox="1"/>
+          <p:nvPr/>
+        </p:nvSpPr>
+        <p:spPr>
+          <a:xfrm>
+            <a:off x="87153" y="2501064"/>
+            <a:ext cx="1435211" cy="87153"/>
+          </a:xfrm>
+          <a:prstGeom prst="rect">
+            <a:avLst/>
+          </a:prstGeom>
+          <a:noFill/>
+        </p:spPr>
+        <p:txBody>
+          <a:bodyPr wrap="none" lIns="0" rIns="0" tIns="0" bIns="0" anchor="t">
+            <a:noAutofit/>
+          </a:bodyPr>
+          <a:lstStyle/>
+          <a:p>
+            <a:pPr algn="l"/>
+            <a:r>
+              <a:rPr sz="600" b="1" i="0" u="none" lang="de-DE">
+                <a:solidFill>
+                  <a:srgbClr val="1A1A1A"/>
+                </a:solidFill>
+                <a:latin typeface="Arial"/>
+              </a:rPr>
+              <a:t>Ansprechpartner Zentrales Controlling</a:t>
+            </a:r>
+          </a:p>
+        </p:txBody>
+      </p:sp>
+      <p:sp>
+        <p:nvSpPr>
+          <p:cNvPr id="60" name="Text mk-label"/>
+          <p:cNvSpPr txBox="1"/>
+          <p:nvPr/>
+        </p:nvSpPr>
+        <p:spPr>
+          <a:xfrm>
+            <a:off x="87153" y="2686264"/>
+            <a:ext cx="236180" cy="87153"/>
+          </a:xfrm>
+          <a:prstGeom prst="rect">
+            <a:avLst/>
+          </a:prstGeom>
+          <a:noFill/>
+        </p:spPr>
+        <p:txBody>
+          <a:bodyPr wrap="none" lIns="0" rIns="0" tIns="0" bIns="0" anchor="t">
+            <a:noAutofit/>
+          </a:bodyPr>
+          <a:lstStyle/>
+          <a:p>
+            <a:pPr algn="l"/>
+            <a:r>
+              <a:rPr sz="600" b="0" i="0" u="none" lang="de-DE">
+                <a:solidFill>
+                  <a:srgbClr val="1A1A1A"/>
+                </a:solidFill>
+                <a:latin typeface="Arial"/>
+              </a:rPr>
+              <a:t>Name</a:t>
+            </a:r>
+          </a:p>
+        </p:txBody>
+      </p:sp>
+      <p:sp>
+        <p:nvSpPr>
+          <p:cNvPr id="61" name="f-name"/>
           <p:cNvSpPr/>
           <p:nvPr/>
         </p:nvSpPr>
         <p:spPr>
           <a:xfrm>
-            <a:off x="3036726" y="661816"/>
-            <a:ext cx="833398" cy="136176"/>
+            <a:off x="1004979" y="2666327"/>
+            <a:ext cx="1040385" cy="136176"/>
           </a:xfrm>
           <a:prstGeom prst="roundRect">
             <a:avLst>
@@ -3697,14 +5176,14 @@
       </p:sp>
       <p:sp>
         <p:nvSpPr>
-          <p:cNvPr id="19" name="Text SPAN"/>
+          <p:cNvPr id="62" name="Text SPAN"/>
           <p:cNvSpPr txBox="1"/>
           <p:nvPr/>
         </p:nvSpPr>
         <p:spPr>
           <a:xfrm>
-            <a:off x="3077579" y="681752"/>
-            <a:ext cx="374654" cy="87153"/>
+            <a:off x="1045832" y="2686264"/>
+            <a:ext cx="429721" cy="87153"/>
           </a:xfrm>
           <a:prstGeom prst="rect">
             <a:avLst/>
@@ -3725,21 +5204,21 @@
                 </a:solidFill>
                 <a:latin typeface="Arial"/>
               </a:rPr>
-              <a:t>Variante 2</a:t>
-            </a:r>
-          </a:p>
-        </p:txBody>
-      </p:sp>
-      <p:sp>
-        <p:nvSpPr>
-          <p:cNvPr id="20" name="Form"/>
+              <a:t>Frau Wendt</a:t>
+            </a:r>
+          </a:p>
+        </p:txBody>
+      </p:sp>
+      <p:sp>
+        <p:nvSpPr>
+          <p:cNvPr id="63" name="Form"/>
           <p:cNvSpPr/>
           <p:nvPr/>
         </p:nvSpPr>
         <p:spPr>
           <a:xfrm>
-            <a:off x="3774801" y="719010"/>
-            <a:ext cx="43576" cy="27235"/>
+            <a:off x="1950041" y="2723521"/>
+            <a:ext cx="43577" cy="27236"/>
           </a:xfrm>
           <a:custGeom>
             <a:avLst/>
@@ -3748,15 +5227,15 @@
             <a:cxnLst/>
             <a:rect l="l" t="t" r="r" b="b"/>
             <a:pathLst>
-              <a:path w="43576" h="27235">
+              <a:path w="43577" h="27236">
                 <a:moveTo>
                   <a:pt x="0" y="0"/>
                 </a:moveTo>
                 <a:lnTo>
-                  <a:pt x="43576" y="0"/>
+                  <a:pt x="43577" y="0"/>
                 </a:lnTo>
                 <a:lnTo>
-                  <a:pt x="21788" y="27235"/>
+                  <a:pt x="21788" y="27236"/>
                 </a:lnTo>
                 <a:close/>
               </a:path>
@@ -3779,14 +5258,14 @@
       </p:sp>
       <p:sp>
         <p:nvSpPr>
-          <p:cNvPr id="21" name="Text l-p0"/>
+          <p:cNvPr id="64" name="Text mk-label"/>
           <p:cNvSpPr txBox="1"/>
           <p:nvPr/>
         </p:nvSpPr>
         <p:spPr>
           <a:xfrm>
-            <a:off x="87153" y="845163"/>
-            <a:ext cx="469382" cy="87153"/>
+            <a:off x="87153" y="2849675"/>
+            <a:ext cx="553981" cy="87153"/>
           </a:xfrm>
           <a:prstGeom prst="rect">
             <a:avLst/>
@@ -3807,1472 +5286,20 @@
                 </a:solidFill>
                 <a:latin typeface="Arial"/>
               </a:rPr>
-              <a:t>Inflationsrate</a:t>
-            </a:r>
-          </a:p>
-        </p:txBody>
-      </p:sp>
-      <p:sp>
-        <p:nvSpPr>
-          <p:cNvPr id="22" name="p0-0"/>
+              <a:t>E-Mail-Adresse</a:t>
+            </a:r>
+          </a:p>
+        </p:txBody>
+      </p:sp>
+      <p:sp>
+        <p:nvSpPr>
+          <p:cNvPr id="65" name="f-email"/>
           <p:cNvSpPr/>
           <p:nvPr/>
         </p:nvSpPr>
         <p:spPr>
           <a:xfrm>
-            <a:off x="1004979" y="825227"/>
-            <a:ext cx="1040385" cy="136176"/>
-          </a:xfrm>
-          <a:prstGeom prst="roundRect">
-            <a:avLst>
-              <a:gd name="adj" fmla="val 8000"/>
-            </a:avLst>
-          </a:prstGeom>
-          <a:solidFill>
-            <a:srgbClr val="FFFFFF"/>
-          </a:solidFill>
-          <a:ln w="5447">
-            <a:solidFill>
-              <a:srgbClr val="9A9A9A"/>
-            </a:solidFill>
-          </a:ln>
-        </p:spPr>
-        <p:txBody>
-          <a:bodyPr rtlCol="0" anchor="ctr"/>
-          <a:lstStyle/>
-          <a:p>
-            <a:pPr algn="ctr"/>
-          </a:p>
-        </p:txBody>
-      </p:sp>
-      <p:sp>
-        <p:nvSpPr>
-          <p:cNvPr id="23" name="Text p0-0"/>
-          <p:cNvSpPr txBox="1"/>
-          <p:nvPr/>
-        </p:nvSpPr>
-        <p:spPr>
-          <a:xfrm>
-            <a:off x="1865782" y="845163"/>
-            <a:ext cx="138729" cy="87153"/>
-          </a:xfrm>
-          <a:prstGeom prst="rect">
-            <a:avLst/>
-          </a:prstGeom>
-          <a:noFill/>
-        </p:spPr>
-        <p:txBody>
-          <a:bodyPr wrap="none" lIns="0" rIns="0" tIns="0" bIns="0" anchor="t">
-            <a:noAutofit/>
-          </a:bodyPr>
-          <a:lstStyle/>
-          <a:p>
-            <a:pPr algn="r"/>
-            <a:r>
-              <a:rPr sz="600" b="0" i="0" u="none" lang="de-DE">
-                <a:solidFill>
-                  <a:srgbClr val="1A1A1A"/>
-                </a:solidFill>
-                <a:latin typeface="Arial"/>
-              </a:rPr>
-              <a:t>1,2</a:t>
-            </a:r>
-          </a:p>
-        </p:txBody>
-      </p:sp>
-      <p:sp>
-        <p:nvSpPr>
-          <p:cNvPr id="24" name="p0-1"/>
-          <p:cNvSpPr/>
-          <p:nvPr/>
-        </p:nvSpPr>
-        <p:spPr>
-          <a:xfrm>
-            <a:off x="2159752" y="825227"/>
-            <a:ext cx="833398" cy="136176"/>
-          </a:xfrm>
-          <a:prstGeom prst="roundRect">
-            <a:avLst>
-              <a:gd name="adj" fmla="val 8000"/>
-            </a:avLst>
-          </a:prstGeom>
-          <a:solidFill>
-            <a:srgbClr val="FFFFFF"/>
-          </a:solidFill>
-          <a:ln w="5447">
-            <a:solidFill>
-              <a:srgbClr val="9A9A9A"/>
-            </a:solidFill>
-          </a:ln>
-        </p:spPr>
-        <p:txBody>
-          <a:bodyPr rtlCol="0" anchor="ctr"/>
-          <a:lstStyle/>
-          <a:p>
-            <a:pPr algn="ctr"/>
-          </a:p>
-        </p:txBody>
-      </p:sp>
-      <p:sp>
-        <p:nvSpPr>
-          <p:cNvPr id="25" name="p0-2"/>
-          <p:cNvSpPr/>
-          <p:nvPr/>
-        </p:nvSpPr>
-        <p:spPr>
-          <a:xfrm>
-            <a:off x="3036726" y="825227"/>
-            <a:ext cx="833398" cy="136176"/>
-          </a:xfrm>
-          <a:prstGeom prst="roundRect">
-            <a:avLst>
-              <a:gd name="adj" fmla="val 8000"/>
-            </a:avLst>
-          </a:prstGeom>
-          <a:solidFill>
-            <a:srgbClr val="FFFFFF"/>
-          </a:solidFill>
-          <a:ln w="5447">
-            <a:solidFill>
-              <a:srgbClr val="9A9A9A"/>
-            </a:solidFill>
-          </a:ln>
-        </p:spPr>
-        <p:txBody>
-          <a:bodyPr rtlCol="0" anchor="ctr"/>
-          <a:lstStyle/>
-          <a:p>
-            <a:pPr algn="ctr"/>
-          </a:p>
-        </p:txBody>
-      </p:sp>
-      <p:sp>
-        <p:nvSpPr>
-          <p:cNvPr id="26" name="Text l-p1"/>
-          <p:cNvSpPr txBox="1"/>
-          <p:nvPr/>
-        </p:nvSpPr>
-        <p:spPr>
-          <a:xfrm>
-            <a:off x="87153" y="1008574"/>
-            <a:ext cx="753054" cy="87153"/>
-          </a:xfrm>
-          <a:prstGeom prst="rect">
-            <a:avLst/>
-          </a:prstGeom>
-          <a:noFill/>
-        </p:spPr>
-        <p:txBody>
-          <a:bodyPr wrap="none" lIns="0" rIns="0" tIns="0" bIns="0" anchor="t">
-            <a:noAutofit/>
-          </a:bodyPr>
-          <a:lstStyle/>
-          <a:p>
-            <a:pPr algn="l"/>
-            <a:r>
-              <a:rPr sz="600" b="0" i="0" u="none" lang="de-DE">
-                <a:solidFill>
-                  <a:srgbClr val="1A1A1A"/>
-                </a:solidFill>
-                <a:latin typeface="Arial"/>
-              </a:rPr>
-              <a:t>Wirtschaftswachstum</a:t>
-            </a:r>
-          </a:p>
-        </p:txBody>
-      </p:sp>
-      <p:sp>
-        <p:nvSpPr>
-          <p:cNvPr id="27" name="p1-0"/>
-          <p:cNvSpPr/>
-          <p:nvPr/>
-        </p:nvSpPr>
-        <p:spPr>
-          <a:xfrm>
-            <a:off x="1004979" y="988638"/>
-            <a:ext cx="1040385" cy="136176"/>
-          </a:xfrm>
-          <a:prstGeom prst="roundRect">
-            <a:avLst>
-              <a:gd name="adj" fmla="val 8000"/>
-            </a:avLst>
-          </a:prstGeom>
-          <a:solidFill>
-            <a:srgbClr val="FFFFFF"/>
-          </a:solidFill>
-          <a:ln w="5447">
-            <a:solidFill>
-              <a:srgbClr val="9A9A9A"/>
-            </a:solidFill>
-          </a:ln>
-        </p:spPr>
-        <p:txBody>
-          <a:bodyPr rtlCol="0" anchor="ctr"/>
-          <a:lstStyle/>
-          <a:p>
-            <a:pPr algn="ctr"/>
-          </a:p>
-        </p:txBody>
-      </p:sp>
-      <p:sp>
-        <p:nvSpPr>
-          <p:cNvPr id="28" name="Text p1-0"/>
-          <p:cNvSpPr txBox="1"/>
-          <p:nvPr/>
-        </p:nvSpPr>
-        <p:spPr>
-          <a:xfrm>
-            <a:off x="1865782" y="1008574"/>
-            <a:ext cx="138729" cy="87153"/>
-          </a:xfrm>
-          <a:prstGeom prst="rect">
-            <a:avLst/>
-          </a:prstGeom>
-          <a:noFill/>
-        </p:spPr>
-        <p:txBody>
-          <a:bodyPr wrap="none" lIns="0" rIns="0" tIns="0" bIns="0" anchor="t">
-            <a:noAutofit/>
-          </a:bodyPr>
-          <a:lstStyle/>
-          <a:p>
-            <a:pPr algn="r"/>
-            <a:r>
-              <a:rPr sz="600" b="0" i="0" u="none" lang="de-DE">
-                <a:solidFill>
-                  <a:srgbClr val="1A1A1A"/>
-                </a:solidFill>
-                <a:latin typeface="Arial"/>
-              </a:rPr>
-              <a:t>2,5</a:t>
-            </a:r>
-          </a:p>
-        </p:txBody>
-      </p:sp>
-      <p:sp>
-        <p:nvSpPr>
-          <p:cNvPr id="29" name="p1-1"/>
-          <p:cNvSpPr/>
-          <p:nvPr/>
-        </p:nvSpPr>
-        <p:spPr>
-          <a:xfrm>
-            <a:off x="2159752" y="988638"/>
-            <a:ext cx="833398" cy="136176"/>
-          </a:xfrm>
-          <a:prstGeom prst="roundRect">
-            <a:avLst>
-              <a:gd name="adj" fmla="val 8000"/>
-            </a:avLst>
-          </a:prstGeom>
-          <a:solidFill>
-            <a:srgbClr val="FFFFFF"/>
-          </a:solidFill>
-          <a:ln w="5447">
-            <a:solidFill>
-              <a:srgbClr val="9A9A9A"/>
-            </a:solidFill>
-          </a:ln>
-        </p:spPr>
-        <p:txBody>
-          <a:bodyPr rtlCol="0" anchor="ctr"/>
-          <a:lstStyle/>
-          <a:p>
-            <a:pPr algn="ctr"/>
-          </a:p>
-        </p:txBody>
-      </p:sp>
-      <p:sp>
-        <p:nvSpPr>
-          <p:cNvPr id="30" name="p1-2"/>
-          <p:cNvSpPr/>
-          <p:nvPr/>
-        </p:nvSpPr>
-        <p:spPr>
-          <a:xfrm>
-            <a:off x="3036726" y="988638"/>
-            <a:ext cx="833398" cy="136176"/>
-          </a:xfrm>
-          <a:prstGeom prst="roundRect">
-            <a:avLst>
-              <a:gd name="adj" fmla="val 8000"/>
-            </a:avLst>
-          </a:prstGeom>
-          <a:solidFill>
-            <a:srgbClr val="FFFFFF"/>
-          </a:solidFill>
-          <a:ln w="5447">
-            <a:solidFill>
-              <a:srgbClr val="9A9A9A"/>
-            </a:solidFill>
-          </a:ln>
-        </p:spPr>
-        <p:txBody>
-          <a:bodyPr rtlCol="0" anchor="ctr"/>
-          <a:lstStyle/>
-          <a:p>
-            <a:pPr algn="ctr"/>
-          </a:p>
-        </p:txBody>
-      </p:sp>
-      <p:sp>
-        <p:nvSpPr>
-          <p:cNvPr id="31" name="Text l-p2"/>
-          <p:cNvSpPr txBox="1"/>
-          <p:nvPr/>
-        </p:nvSpPr>
-        <p:spPr>
-          <a:xfrm>
-            <a:off x="87153" y="1171986"/>
-            <a:ext cx="859356" cy="87153"/>
-          </a:xfrm>
-          <a:prstGeom prst="rect">
-            <a:avLst/>
-          </a:prstGeom>
-          <a:noFill/>
-        </p:spPr>
-        <p:txBody>
-          <a:bodyPr wrap="none" lIns="0" rIns="0" tIns="0" bIns="0" anchor="t">
-            <a:noAutofit/>
-          </a:bodyPr>
-          <a:lstStyle/>
-          <a:p>
-            <a:pPr algn="l"/>
-            <a:r>
-              <a:rPr sz="600" b="0" i="0" u="none" lang="de-DE">
-                <a:solidFill>
-                  <a:srgbClr val="1A1A1A"/>
-                </a:solidFill>
-                <a:latin typeface="Arial"/>
-              </a:rPr>
-              <a:t>Personalsteigerungsrate</a:t>
-            </a:r>
-          </a:p>
-        </p:txBody>
-      </p:sp>
-      <p:sp>
-        <p:nvSpPr>
-          <p:cNvPr id="32" name="p2-0"/>
-          <p:cNvSpPr/>
-          <p:nvPr/>
-        </p:nvSpPr>
-        <p:spPr>
-          <a:xfrm>
-            <a:off x="1004979" y="1152050"/>
-            <a:ext cx="1040385" cy="136176"/>
-          </a:xfrm>
-          <a:prstGeom prst="roundRect">
-            <a:avLst>
-              <a:gd name="adj" fmla="val 8000"/>
-            </a:avLst>
-          </a:prstGeom>
-          <a:solidFill>
-            <a:srgbClr val="FFFFFF"/>
-          </a:solidFill>
-          <a:ln w="5447">
-            <a:solidFill>
-              <a:srgbClr val="9A9A9A"/>
-            </a:solidFill>
-          </a:ln>
-        </p:spPr>
-        <p:txBody>
-          <a:bodyPr rtlCol="0" anchor="ctr"/>
-          <a:lstStyle/>
-          <a:p>
-            <a:pPr algn="ctr"/>
-          </a:p>
-        </p:txBody>
-      </p:sp>
-      <p:sp>
-        <p:nvSpPr>
-          <p:cNvPr id="33" name="Text p2-0"/>
-          <p:cNvSpPr txBox="1"/>
-          <p:nvPr/>
-        </p:nvSpPr>
-        <p:spPr>
-          <a:xfrm>
-            <a:off x="1865782" y="1171986"/>
-            <a:ext cx="138729" cy="87153"/>
-          </a:xfrm>
-          <a:prstGeom prst="rect">
-            <a:avLst/>
-          </a:prstGeom>
-          <a:noFill/>
-        </p:spPr>
-        <p:txBody>
-          <a:bodyPr wrap="none" lIns="0" rIns="0" tIns="0" bIns="0" anchor="t">
-            <a:noAutofit/>
-          </a:bodyPr>
-          <a:lstStyle/>
-          <a:p>
-            <a:pPr algn="r"/>
-            <a:r>
-              <a:rPr sz="600" b="0" i="0" u="none" lang="de-DE">
-                <a:solidFill>
-                  <a:srgbClr val="1A1A1A"/>
-                </a:solidFill>
-                <a:latin typeface="Arial"/>
-              </a:rPr>
-              <a:t>3,5</a:t>
-            </a:r>
-          </a:p>
-        </p:txBody>
-      </p:sp>
-      <p:sp>
-        <p:nvSpPr>
-          <p:cNvPr id="34" name="p2-1"/>
-          <p:cNvSpPr/>
-          <p:nvPr/>
-        </p:nvSpPr>
-        <p:spPr>
-          <a:xfrm>
-            <a:off x="2159752" y="1152050"/>
-            <a:ext cx="833398" cy="136176"/>
-          </a:xfrm>
-          <a:prstGeom prst="roundRect">
-            <a:avLst>
-              <a:gd name="adj" fmla="val 8000"/>
-            </a:avLst>
-          </a:prstGeom>
-          <a:solidFill>
-            <a:srgbClr val="FFFFFF"/>
-          </a:solidFill>
-          <a:ln w="5447">
-            <a:solidFill>
-              <a:srgbClr val="9A9A9A"/>
-            </a:solidFill>
-          </a:ln>
-        </p:spPr>
-        <p:txBody>
-          <a:bodyPr rtlCol="0" anchor="ctr"/>
-          <a:lstStyle/>
-          <a:p>
-            <a:pPr algn="ctr"/>
-          </a:p>
-        </p:txBody>
-      </p:sp>
-      <p:sp>
-        <p:nvSpPr>
-          <p:cNvPr id="35" name="p2-2"/>
-          <p:cNvSpPr/>
-          <p:nvPr/>
-        </p:nvSpPr>
-        <p:spPr>
-          <a:xfrm>
-            <a:off x="3036726" y="1152050"/>
-            <a:ext cx="833398" cy="136176"/>
-          </a:xfrm>
-          <a:prstGeom prst="roundRect">
-            <a:avLst>
-              <a:gd name="adj" fmla="val 8000"/>
-            </a:avLst>
-          </a:prstGeom>
-          <a:solidFill>
-            <a:srgbClr val="FFFFFF"/>
-          </a:solidFill>
-          <a:ln w="5447">
-            <a:solidFill>
-              <a:srgbClr val="9A9A9A"/>
-            </a:solidFill>
-          </a:ln>
-        </p:spPr>
-        <p:txBody>
-          <a:bodyPr rtlCol="0" anchor="ctr"/>
-          <a:lstStyle/>
-          <a:p>
-            <a:pPr algn="ctr"/>
-          </a:p>
-        </p:txBody>
-      </p:sp>
-      <p:sp>
-        <p:nvSpPr>
-          <p:cNvPr id="36" name="Text l-p3"/>
-          <p:cNvSpPr txBox="1"/>
-          <p:nvPr/>
-        </p:nvSpPr>
-        <p:spPr>
-          <a:xfrm>
-            <a:off x="87153" y="1335397"/>
-            <a:ext cx="634410" cy="87153"/>
-          </a:xfrm>
-          <a:prstGeom prst="rect">
-            <a:avLst/>
-          </a:prstGeom>
-          <a:noFill/>
-        </p:spPr>
-        <p:txBody>
-          <a:bodyPr wrap="none" lIns="0" rIns="0" tIns="0" bIns="0" anchor="t">
-            <a:noAutofit/>
-          </a:bodyPr>
-          <a:lstStyle/>
-          <a:p>
-            <a:pPr algn="l"/>
-            <a:r>
-              <a:rPr sz="600" b="0" i="0" u="none" lang="de-DE">
-                <a:solidFill>
-                  <a:srgbClr val="1A1A1A"/>
-                </a:solidFill>
-                <a:latin typeface="Arial"/>
-              </a:rPr>
-              <a:t>Umsatzwachstum</a:t>
-            </a:r>
-          </a:p>
-        </p:txBody>
-      </p:sp>
-      <p:sp>
-        <p:nvSpPr>
-          <p:cNvPr id="37" name="p3-0"/>
-          <p:cNvSpPr/>
-          <p:nvPr/>
-        </p:nvSpPr>
-        <p:spPr>
-          <a:xfrm>
-            <a:off x="1004979" y="1315461"/>
-            <a:ext cx="1040385" cy="136176"/>
-          </a:xfrm>
-          <a:prstGeom prst="roundRect">
-            <a:avLst>
-              <a:gd name="adj" fmla="val 8000"/>
-            </a:avLst>
-          </a:prstGeom>
-          <a:solidFill>
-            <a:srgbClr val="FFFFFF"/>
-          </a:solidFill>
-          <a:ln w="5447">
-            <a:solidFill>
-              <a:srgbClr val="9A9A9A"/>
-            </a:solidFill>
-          </a:ln>
-        </p:spPr>
-        <p:txBody>
-          <a:bodyPr rtlCol="0" anchor="ctr"/>
-          <a:lstStyle/>
-          <a:p>
-            <a:pPr algn="ctr"/>
-          </a:p>
-        </p:txBody>
-      </p:sp>
-      <p:sp>
-        <p:nvSpPr>
-          <p:cNvPr id="38" name="Text p3-0"/>
-          <p:cNvSpPr txBox="1"/>
-          <p:nvPr/>
-        </p:nvSpPr>
-        <p:spPr>
-          <a:xfrm>
-            <a:off x="1865782" y="1335397"/>
-            <a:ext cx="138729" cy="87153"/>
-          </a:xfrm>
-          <a:prstGeom prst="rect">
-            <a:avLst/>
-          </a:prstGeom>
-          <a:noFill/>
-        </p:spPr>
-        <p:txBody>
-          <a:bodyPr wrap="none" lIns="0" rIns="0" tIns="0" bIns="0" anchor="t">
-            <a:noAutofit/>
-          </a:bodyPr>
-          <a:lstStyle/>
-          <a:p>
-            <a:pPr algn="r"/>
-            <a:r>
-              <a:rPr sz="600" b="0" i="0" u="none" lang="de-DE">
-                <a:solidFill>
-                  <a:srgbClr val="1A1A1A"/>
-                </a:solidFill>
-                <a:latin typeface="Arial"/>
-              </a:rPr>
-              <a:t>4,5</a:t>
-            </a:r>
-          </a:p>
-        </p:txBody>
-      </p:sp>
-      <p:sp>
-        <p:nvSpPr>
-          <p:cNvPr id="39" name="p3-1"/>
-          <p:cNvSpPr/>
-          <p:nvPr/>
-        </p:nvSpPr>
-        <p:spPr>
-          <a:xfrm>
-            <a:off x="2159752" y="1315461"/>
-            <a:ext cx="833398" cy="136176"/>
-          </a:xfrm>
-          <a:prstGeom prst="roundRect">
-            <a:avLst>
-              <a:gd name="adj" fmla="val 8000"/>
-            </a:avLst>
-          </a:prstGeom>
-          <a:solidFill>
-            <a:srgbClr val="FFFFFF"/>
-          </a:solidFill>
-          <a:ln w="5447">
-            <a:solidFill>
-              <a:srgbClr val="9A9A9A"/>
-            </a:solidFill>
-          </a:ln>
-        </p:spPr>
-        <p:txBody>
-          <a:bodyPr rtlCol="0" anchor="ctr"/>
-          <a:lstStyle/>
-          <a:p>
-            <a:pPr algn="ctr"/>
-          </a:p>
-        </p:txBody>
-      </p:sp>
-      <p:sp>
-        <p:nvSpPr>
-          <p:cNvPr id="40" name="p3-2"/>
-          <p:cNvSpPr/>
-          <p:nvPr/>
-        </p:nvSpPr>
-        <p:spPr>
-          <a:xfrm>
-            <a:off x="3036726" y="1315461"/>
-            <a:ext cx="833398" cy="136176"/>
-          </a:xfrm>
-          <a:prstGeom prst="roundRect">
-            <a:avLst>
-              <a:gd name="adj" fmla="val 8000"/>
-            </a:avLst>
-          </a:prstGeom>
-          <a:solidFill>
-            <a:srgbClr val="FFFFFF"/>
-          </a:solidFill>
-          <a:ln w="5447">
-            <a:solidFill>
-              <a:srgbClr val="9A9A9A"/>
-            </a:solidFill>
-          </a:ln>
-        </p:spPr>
-        <p:txBody>
-          <a:bodyPr rtlCol="0" anchor="ctr"/>
-          <a:lstStyle/>
-          <a:p>
-            <a:pPr algn="ctr"/>
-          </a:p>
-        </p:txBody>
-      </p:sp>
-      <p:sp>
-        <p:nvSpPr>
-          <p:cNvPr id="41" name="band-teilplaene"/>
-          <p:cNvSpPr/>
-          <p:nvPr/>
-        </p:nvSpPr>
-        <p:spPr>
-          <a:xfrm>
-            <a:off x="87153" y="1552407"/>
-            <a:ext cx="3785695" cy="141623"/>
-          </a:xfrm>
-          <a:prstGeom prst="rect">
-            <a:avLst/>
-          </a:prstGeom>
-          <a:solidFill>
-            <a:srgbClr val="F6F6F6"/>
-          </a:solidFill>
-          <a:ln>
-            <a:noFill/>
-          </a:ln>
-        </p:spPr>
-        <p:txBody>
-          <a:bodyPr rtlCol="0" anchor="ctr"/>
-          <a:lstStyle/>
-          <a:p>
-            <a:pPr algn="ctr"/>
-          </a:p>
-        </p:txBody>
-      </p:sp>
-      <p:sp>
-        <p:nvSpPr>
-          <p:cNvPr id="42" name="Text band-teilplaene"/>
-          <p:cNvSpPr txBox="1"/>
-          <p:nvPr/>
-        </p:nvSpPr>
-        <p:spPr>
-          <a:xfrm>
-            <a:off x="130729" y="1575067"/>
-            <a:ext cx="1584068" cy="87153"/>
-          </a:xfrm>
-          <a:prstGeom prst="rect">
-            <a:avLst/>
-          </a:prstGeom>
-          <a:noFill/>
-        </p:spPr>
-        <p:txBody>
-          <a:bodyPr wrap="none" lIns="0" rIns="0" tIns="0" bIns="0" anchor="t">
-            <a:noAutofit/>
-          </a:bodyPr>
-          <a:lstStyle/>
-          <a:p>
-            <a:pPr algn="l"/>
-            <a:r>
-              <a:rPr sz="600" b="1" i="0" u="none" lang="de-DE" spc="12">
-                <a:solidFill>
-                  <a:srgbClr val="3A3F44"/>
-                </a:solidFill>
-                <a:latin typeface="Arial"/>
-              </a:rPr>
-              <a:t>PLANUNGSPRÄMISSEN FÜR TEILPLÄNE</a:t>
-            </a:r>
-          </a:p>
-        </p:txBody>
-      </p:sp>
-      <p:sp>
-        <p:nvSpPr>
-          <p:cNvPr id="43" name="Text mk-label"/>
-          <p:cNvSpPr txBox="1"/>
-          <p:nvPr/>
-        </p:nvSpPr>
-        <p:spPr>
-          <a:xfrm>
-            <a:off x="87153" y="1771160"/>
-            <a:ext cx="291332" cy="87153"/>
-          </a:xfrm>
-          <a:prstGeom prst="rect">
-            <a:avLst/>
-          </a:prstGeom>
-          <a:noFill/>
-        </p:spPr>
-        <p:txBody>
-          <a:bodyPr wrap="none" lIns="0" rIns="0" tIns="0" bIns="0" anchor="t">
-            <a:noAutofit/>
-          </a:bodyPr>
-          <a:lstStyle/>
-          <a:p>
-            <a:pPr algn="l"/>
-            <a:r>
-              <a:rPr sz="600" b="0" i="0" u="none" lang="de-DE">
-                <a:solidFill>
-                  <a:srgbClr val="1A1A1A"/>
-                </a:solidFill>
-                <a:latin typeface="Arial"/>
-              </a:rPr>
-              <a:t>Teilplan</a:t>
-            </a:r>
-          </a:p>
-        </p:txBody>
-      </p:sp>
-      <p:sp>
-        <p:nvSpPr>
-          <p:cNvPr id="44" name="f-teilplan"/>
-          <p:cNvSpPr/>
-          <p:nvPr/>
-        </p:nvSpPr>
-        <p:spPr>
-          <a:xfrm>
-            <a:off x="1004979" y="1751224"/>
-            <a:ext cx="1040385" cy="136176"/>
-          </a:xfrm>
-          <a:prstGeom prst="roundRect">
-            <a:avLst>
-              <a:gd name="adj" fmla="val 8000"/>
-            </a:avLst>
-          </a:prstGeom>
-          <a:solidFill>
-            <a:srgbClr val="FFFFFF"/>
-          </a:solidFill>
-          <a:ln w="5447">
-            <a:solidFill>
-              <a:srgbClr val="9A9A9A"/>
-            </a:solidFill>
-          </a:ln>
-        </p:spPr>
-        <p:txBody>
-          <a:bodyPr rtlCol="0" anchor="ctr"/>
-          <a:lstStyle/>
-          <a:p>
-            <a:pPr algn="ctr"/>
-          </a:p>
-        </p:txBody>
-      </p:sp>
-      <p:sp>
-        <p:nvSpPr>
-          <p:cNvPr id="45" name="Text SPAN"/>
-          <p:cNvSpPr txBox="1"/>
-          <p:nvPr/>
-        </p:nvSpPr>
-        <p:spPr>
-          <a:xfrm>
-            <a:off x="1045832" y="1771160"/>
-            <a:ext cx="537300" cy="87153"/>
-          </a:xfrm>
-          <a:prstGeom prst="rect">
-            <a:avLst/>
-          </a:prstGeom>
-          <a:noFill/>
-        </p:spPr>
-        <p:txBody>
-          <a:bodyPr wrap="none" lIns="0" rIns="0" tIns="0" bIns="0" anchor="t">
-            <a:noAutofit/>
-          </a:bodyPr>
-          <a:lstStyle/>
-          <a:p>
-            <a:pPr algn="l"/>
-            <a:r>
-              <a:rPr sz="600" b="0" i="0" u="none" lang="de-DE">
-                <a:solidFill>
-                  <a:srgbClr val="1A1A1A"/>
-                </a:solidFill>
-                <a:latin typeface="Arial"/>
-              </a:rPr>
-              <a:t>Absatzplanung</a:t>
-            </a:r>
-          </a:p>
-        </p:txBody>
-      </p:sp>
-      <p:sp>
-        <p:nvSpPr>
-          <p:cNvPr id="46" name="Form"/>
-          <p:cNvSpPr/>
-          <p:nvPr/>
-        </p:nvSpPr>
-        <p:spPr>
-          <a:xfrm>
-            <a:off x="1950041" y="1808418"/>
-            <a:ext cx="43577" cy="27235"/>
-          </a:xfrm>
-          <a:custGeom>
-            <a:avLst/>
-            <a:gdLst/>
-            <a:ahLst/>
-            <a:cxnLst/>
-            <a:rect l="l" t="t" r="r" b="b"/>
-            <a:pathLst>
-              <a:path w="43577" h="27235">
-                <a:moveTo>
-                  <a:pt x="0" y="0"/>
-                </a:moveTo>
-                <a:lnTo>
-                  <a:pt x="43577" y="0"/>
-                </a:lnTo>
-                <a:lnTo>
-                  <a:pt x="21788" y="27235"/>
-                </a:lnTo>
-                <a:close/>
-              </a:path>
-            </a:pathLst>
-          </a:custGeom>
-          <a:solidFill>
-            <a:srgbClr val="3A3F44"/>
-          </a:solidFill>
-          <a:ln>
-            <a:noFill/>
-          </a:ln>
-        </p:spPr>
-        <p:txBody>
-          <a:bodyPr rtlCol="0" anchor="ctr"/>
-          <a:lstStyle/>
-          <a:p>
-            <a:pPr algn="ctr"/>
-          </a:p>
-        </p:txBody>
-      </p:sp>
-      <p:sp>
-        <p:nvSpPr>
-          <p:cNvPr id="47" name="Text mk-label"/>
-          <p:cNvSpPr txBox="1"/>
-          <p:nvPr/>
-        </p:nvSpPr>
-        <p:spPr>
-          <a:xfrm>
-            <a:off x="87153" y="1934572"/>
-            <a:ext cx="643091" cy="87153"/>
-          </a:xfrm>
-          <a:prstGeom prst="rect">
-            <a:avLst/>
-          </a:prstGeom>
-          <a:noFill/>
-        </p:spPr>
-        <p:txBody>
-          <a:bodyPr wrap="none" lIns="0" rIns="0" tIns="0" bIns="0" anchor="t">
-            <a:noAutofit/>
-          </a:bodyPr>
-          <a:lstStyle/>
-          <a:p>
-            <a:pPr algn="l"/>
-            <a:r>
-              <a:rPr sz="600" b="0" i="0" u="none" lang="de-DE">
-                <a:solidFill>
-                  <a:srgbClr val="1A1A1A"/>
-                </a:solidFill>
-                <a:latin typeface="Arial"/>
-              </a:rPr>
-              <a:t>Planungszeitraum</a:t>
-            </a:r>
-          </a:p>
-        </p:txBody>
-      </p:sp>
-      <p:sp>
-        <p:nvSpPr>
-          <p:cNvPr id="48" name="f-von"/>
-          <p:cNvSpPr/>
-          <p:nvPr/>
-        </p:nvSpPr>
-        <p:spPr>
-          <a:xfrm>
-            <a:off x="1004979" y="1914635"/>
-            <a:ext cx="436019" cy="136176"/>
-          </a:xfrm>
-          <a:prstGeom prst="roundRect">
-            <a:avLst>
-              <a:gd name="adj" fmla="val 8000"/>
-            </a:avLst>
-          </a:prstGeom>
-          <a:solidFill>
-            <a:srgbClr val="FFFFFF"/>
-          </a:solidFill>
-          <a:ln w="5447">
-            <a:solidFill>
-              <a:srgbClr val="9A9A9A"/>
-            </a:solidFill>
-          </a:ln>
-        </p:spPr>
-        <p:txBody>
-          <a:bodyPr rtlCol="0" anchor="ctr"/>
-          <a:lstStyle/>
-          <a:p>
-            <a:pPr algn="ctr"/>
-          </a:p>
-        </p:txBody>
-      </p:sp>
-      <p:sp>
-        <p:nvSpPr>
-          <p:cNvPr id="49" name="Text f-von"/>
-          <p:cNvSpPr txBox="1"/>
-          <p:nvPr/>
-        </p:nvSpPr>
-        <p:spPr>
-          <a:xfrm>
-            <a:off x="1015788" y="1934572"/>
-            <a:ext cx="414401" cy="87153"/>
-          </a:xfrm>
-          <a:prstGeom prst="rect">
-            <a:avLst/>
-          </a:prstGeom>
-          <a:noFill/>
-        </p:spPr>
-        <p:txBody>
-          <a:bodyPr wrap="none" lIns="0" rIns="0" tIns="0" bIns="0" anchor="t">
-            <a:noAutofit/>
-          </a:bodyPr>
-          <a:lstStyle/>
-          <a:p>
-            <a:pPr algn="ctr"/>
-            <a:r>
-              <a:rPr sz="600" b="0" i="0" u="none" lang="de-DE">
-                <a:solidFill>
-                  <a:srgbClr val="1A1A1A"/>
-                </a:solidFill>
-                <a:latin typeface="Arial"/>
-              </a:rPr>
-              <a:t>14.09.2026</a:t>
-            </a:r>
-          </a:p>
-        </p:txBody>
-      </p:sp>
-      <p:sp>
-        <p:nvSpPr>
-          <p:cNvPr id="50" name="Text mk-zwischen"/>
-          <p:cNvSpPr txBox="1"/>
-          <p:nvPr/>
-        </p:nvSpPr>
-        <p:spPr>
-          <a:xfrm>
-            <a:off x="1476404" y="1934572"/>
-            <a:ext cx="130218" cy="87153"/>
-          </a:xfrm>
-          <a:prstGeom prst="rect">
-            <a:avLst/>
-          </a:prstGeom>
-          <a:noFill/>
-        </p:spPr>
-        <p:txBody>
-          <a:bodyPr wrap="none" lIns="0" rIns="0" tIns="0" bIns="0" anchor="t">
-            <a:noAutofit/>
-          </a:bodyPr>
-          <a:lstStyle/>
-          <a:p>
-            <a:pPr algn="l"/>
-            <a:r>
-              <a:rPr sz="600" b="0" i="0" u="none" lang="de-DE">
-                <a:solidFill>
-                  <a:srgbClr val="4D4D4D"/>
-                </a:solidFill>
-                <a:latin typeface="Arial"/>
-              </a:rPr>
-              <a:t>bis</a:t>
-            </a:r>
-          </a:p>
-        </p:txBody>
-      </p:sp>
-      <p:sp>
-        <p:nvSpPr>
-          <p:cNvPr id="51" name="f-bis"/>
-          <p:cNvSpPr/>
-          <p:nvPr/>
-        </p:nvSpPr>
-        <p:spPr>
-          <a:xfrm>
-            <a:off x="1609346" y="1914635"/>
-            <a:ext cx="436019" cy="136176"/>
-          </a:xfrm>
-          <a:prstGeom prst="roundRect">
-            <a:avLst>
-              <a:gd name="adj" fmla="val 8000"/>
-            </a:avLst>
-          </a:prstGeom>
-          <a:solidFill>
-            <a:srgbClr val="FFFFFF"/>
-          </a:solidFill>
-          <a:ln w="5447">
-            <a:solidFill>
-              <a:srgbClr val="9A9A9A"/>
-            </a:solidFill>
-          </a:ln>
-        </p:spPr>
-        <p:txBody>
-          <a:bodyPr rtlCol="0" anchor="ctr"/>
-          <a:lstStyle/>
-          <a:p>
-            <a:pPr algn="ctr"/>
-          </a:p>
-        </p:txBody>
-      </p:sp>
-      <p:sp>
-        <p:nvSpPr>
-          <p:cNvPr id="52" name="Text f-bis"/>
-          <p:cNvSpPr txBox="1"/>
-          <p:nvPr/>
-        </p:nvSpPr>
-        <p:spPr>
-          <a:xfrm>
-            <a:off x="1620155" y="1934572"/>
-            <a:ext cx="414401" cy="87153"/>
-          </a:xfrm>
-          <a:prstGeom prst="rect">
-            <a:avLst/>
-          </a:prstGeom>
-          <a:noFill/>
-        </p:spPr>
-        <p:txBody>
-          <a:bodyPr wrap="none" lIns="0" rIns="0" tIns="0" bIns="0" anchor="t">
-            <a:noAutofit/>
-          </a:bodyPr>
-          <a:lstStyle/>
-          <a:p>
-            <a:pPr algn="ctr"/>
-            <a:r>
-              <a:rPr sz="600" b="0" i="0" u="none" lang="de-DE">
-                <a:solidFill>
-                  <a:srgbClr val="1A1A1A"/>
-                </a:solidFill>
-                <a:latin typeface="Arial"/>
-              </a:rPr>
-              <a:t>25.09.2026</a:t>
-            </a:r>
-          </a:p>
-        </p:txBody>
-      </p:sp>
-      <p:sp>
-        <p:nvSpPr>
-          <p:cNvPr id="53" name="Text mk-label"/>
-          <p:cNvSpPr txBox="1"/>
-          <p:nvPr/>
-        </p:nvSpPr>
-        <p:spPr>
-          <a:xfrm>
-            <a:off x="87153" y="2097983"/>
-            <a:ext cx="311077" cy="87153"/>
-          </a:xfrm>
-          <a:prstGeom prst="rect">
-            <a:avLst/>
-          </a:prstGeom>
-          <a:noFill/>
-        </p:spPr>
-        <p:txBody>
-          <a:bodyPr wrap="none" lIns="0" rIns="0" tIns="0" bIns="0" anchor="t">
-            <a:noAutofit/>
-          </a:bodyPr>
-          <a:lstStyle/>
-          <a:p>
-            <a:pPr algn="l"/>
-            <a:r>
-              <a:rPr sz="600" b="0" i="0" u="none" lang="de-DE">
-                <a:solidFill>
-                  <a:srgbClr val="1A1A1A"/>
-                </a:solidFill>
-                <a:latin typeface="Arial"/>
-              </a:rPr>
-              <a:t>Variante</a:t>
-            </a:r>
-          </a:p>
-        </p:txBody>
-      </p:sp>
-      <p:sp>
-        <p:nvSpPr>
-          <p:cNvPr id="54" name="f-variante"/>
-          <p:cNvSpPr/>
-          <p:nvPr/>
-        </p:nvSpPr>
-        <p:spPr>
-          <a:xfrm>
-            <a:off x="1004979" y="2078047"/>
-            <a:ext cx="1040385" cy="136176"/>
-          </a:xfrm>
-          <a:prstGeom prst="roundRect">
-            <a:avLst>
-              <a:gd name="adj" fmla="val 8000"/>
-            </a:avLst>
-          </a:prstGeom>
-          <a:solidFill>
-            <a:srgbClr val="FFFFFF"/>
-          </a:solidFill>
-          <a:ln w="5447">
-            <a:solidFill>
-              <a:srgbClr val="9A9A9A"/>
-            </a:solidFill>
-          </a:ln>
-        </p:spPr>
-        <p:txBody>
-          <a:bodyPr rtlCol="0" anchor="ctr"/>
-          <a:lstStyle/>
-          <a:p>
-            <a:pPr algn="ctr"/>
-          </a:p>
-        </p:txBody>
-      </p:sp>
-      <p:sp>
-        <p:nvSpPr>
-          <p:cNvPr id="55" name="Text SPAN"/>
-          <p:cNvSpPr txBox="1"/>
-          <p:nvPr/>
-        </p:nvSpPr>
-        <p:spPr>
-          <a:xfrm>
-            <a:off x="1045832" y="2097983"/>
-            <a:ext cx="342227" cy="87153"/>
-          </a:xfrm>
-          <a:prstGeom prst="rect">
-            <a:avLst/>
-          </a:prstGeom>
-          <a:noFill/>
-        </p:spPr>
-        <p:txBody>
-          <a:bodyPr wrap="none" lIns="0" rIns="0" tIns="0" bIns="0" anchor="t">
-            <a:noAutofit/>
-          </a:bodyPr>
-          <a:lstStyle/>
-          <a:p>
-            <a:pPr algn="l"/>
-            <a:r>
-              <a:rPr sz="600" b="0" i="0" u="none" lang="de-DE">
-                <a:solidFill>
-                  <a:srgbClr val="1A1A1A"/>
-                </a:solidFill>
-                <a:latin typeface="Arial"/>
-              </a:rPr>
-              <a:t>Standard</a:t>
-            </a:r>
-          </a:p>
-        </p:txBody>
-      </p:sp>
-      <p:sp>
-        <p:nvSpPr>
-          <p:cNvPr id="56" name="Form"/>
-          <p:cNvSpPr/>
-          <p:nvPr/>
-        </p:nvSpPr>
-        <p:spPr>
-          <a:xfrm>
-            <a:off x="1950041" y="2135241"/>
-            <a:ext cx="43577" cy="27235"/>
-          </a:xfrm>
-          <a:custGeom>
-            <a:avLst/>
-            <a:gdLst/>
-            <a:ahLst/>
-            <a:cxnLst/>
-            <a:rect l="l" t="t" r="r" b="b"/>
-            <a:pathLst>
-              <a:path w="43577" h="27235">
-                <a:moveTo>
-                  <a:pt x="0" y="0"/>
-                </a:moveTo>
-                <a:lnTo>
-                  <a:pt x="43577" y="0"/>
-                </a:lnTo>
-                <a:lnTo>
-                  <a:pt x="21788" y="27235"/>
-                </a:lnTo>
-                <a:close/>
-              </a:path>
-            </a:pathLst>
-          </a:custGeom>
-          <a:solidFill>
-            <a:srgbClr val="3A3F44"/>
-          </a:solidFill>
-          <a:ln>
-            <a:noFill/>
-          </a:ln>
-        </p:spPr>
-        <p:txBody>
-          <a:bodyPr rtlCol="0" anchor="ctr"/>
-          <a:lstStyle/>
-          <a:p>
-            <a:pPr algn="ctr"/>
-          </a:p>
-        </p:txBody>
-      </p:sp>
-      <p:cxnSp>
-        <p:nvCxnSpPr>
-          <p:cNvPr id="57" name="Linie"/>
-          <p:cNvCxnSpPr/>
-          <p:nvPr/>
-        </p:nvCxnSpPr>
-        <p:spPr>
-          <a:xfrm>
-            <a:off x="87153" y="2410316"/>
-            <a:ext cx="1960935" cy="0"/>
-          </a:xfrm>
-          <a:prstGeom prst="line">
-            <a:avLst/>
-          </a:prstGeom>
-          <a:ln w="5447">
-            <a:solidFill>
-              <a:srgbClr val="9A9A9A"/>
-            </a:solidFill>
-          </a:ln>
-        </p:spPr>
-      </p:cxnSp>
-      <p:sp>
-        <p:nvSpPr>
-          <p:cNvPr id="58" name="Text mk-gruppenkopf"/>
-          <p:cNvSpPr txBox="1"/>
-          <p:nvPr/>
-        </p:nvSpPr>
-        <p:spPr>
-          <a:xfrm>
-            <a:off x="87153" y="2283182"/>
-            <a:ext cx="1435211" cy="87153"/>
-          </a:xfrm>
-          <a:prstGeom prst="rect">
-            <a:avLst/>
-          </a:prstGeom>
-          <a:noFill/>
-        </p:spPr>
-        <p:txBody>
-          <a:bodyPr wrap="none" lIns="0" rIns="0" tIns="0" bIns="0" anchor="t">
-            <a:noAutofit/>
-          </a:bodyPr>
-          <a:lstStyle/>
-          <a:p>
-            <a:pPr algn="l"/>
-            <a:r>
-              <a:rPr sz="600" b="1" i="0" u="none" lang="de-DE">
-                <a:solidFill>
-                  <a:srgbClr val="1A1A1A"/>
-                </a:solidFill>
-                <a:latin typeface="Arial"/>
-              </a:rPr>
-              <a:t>Ansprechpartner Zentrales Controlling</a:t>
-            </a:r>
-          </a:p>
-        </p:txBody>
-      </p:sp>
-      <p:sp>
-        <p:nvSpPr>
-          <p:cNvPr id="59" name="Text mk-label"/>
-          <p:cNvSpPr txBox="1"/>
-          <p:nvPr/>
-        </p:nvSpPr>
-        <p:spPr>
-          <a:xfrm>
-            <a:off x="87153" y="2468382"/>
-            <a:ext cx="236180" cy="87153"/>
-          </a:xfrm>
-          <a:prstGeom prst="rect">
-            <a:avLst/>
-          </a:prstGeom>
-          <a:noFill/>
-        </p:spPr>
-        <p:txBody>
-          <a:bodyPr wrap="none" lIns="0" rIns="0" tIns="0" bIns="0" anchor="t">
-            <a:noAutofit/>
-          </a:bodyPr>
-          <a:lstStyle/>
-          <a:p>
-            <a:pPr algn="l"/>
-            <a:r>
-              <a:rPr sz="600" b="0" i="0" u="none" lang="de-DE">
-                <a:solidFill>
-                  <a:srgbClr val="1A1A1A"/>
-                </a:solidFill>
-                <a:latin typeface="Arial"/>
-              </a:rPr>
-              <a:t>Name</a:t>
-            </a:r>
-          </a:p>
-        </p:txBody>
-      </p:sp>
-      <p:sp>
-        <p:nvSpPr>
-          <p:cNvPr id="60" name="f-name"/>
-          <p:cNvSpPr/>
-          <p:nvPr/>
-        </p:nvSpPr>
-        <p:spPr>
-          <a:xfrm>
-            <a:off x="1004979" y="2448446"/>
-            <a:ext cx="1040385" cy="136176"/>
-          </a:xfrm>
-          <a:prstGeom prst="roundRect">
-            <a:avLst>
-              <a:gd name="adj" fmla="val 8000"/>
-            </a:avLst>
-          </a:prstGeom>
-          <a:solidFill>
-            <a:srgbClr val="FFFFFF"/>
-          </a:solidFill>
-          <a:ln w="5447">
-            <a:solidFill>
-              <a:srgbClr val="9A9A9A"/>
-            </a:solidFill>
-          </a:ln>
-        </p:spPr>
-        <p:txBody>
-          <a:bodyPr rtlCol="0" anchor="ctr"/>
-          <a:lstStyle/>
-          <a:p>
-            <a:pPr algn="ctr"/>
-          </a:p>
-        </p:txBody>
-      </p:sp>
-      <p:sp>
-        <p:nvSpPr>
-          <p:cNvPr id="61" name="Text SPAN"/>
-          <p:cNvSpPr txBox="1"/>
-          <p:nvPr/>
-        </p:nvSpPr>
-        <p:spPr>
-          <a:xfrm>
-            <a:off x="1045832" y="2468382"/>
-            <a:ext cx="429721" cy="87153"/>
-          </a:xfrm>
-          <a:prstGeom prst="rect">
-            <a:avLst/>
-          </a:prstGeom>
-          <a:noFill/>
-        </p:spPr>
-        <p:txBody>
-          <a:bodyPr wrap="none" lIns="0" rIns="0" tIns="0" bIns="0" anchor="t">
-            <a:noAutofit/>
-          </a:bodyPr>
-          <a:lstStyle/>
-          <a:p>
-            <a:pPr algn="l"/>
-            <a:r>
-              <a:rPr sz="600" b="0" i="0" u="none" lang="de-DE">
-                <a:solidFill>
-                  <a:srgbClr val="1A1A1A"/>
-                </a:solidFill>
-                <a:latin typeface="Arial"/>
-              </a:rPr>
-              <a:t>Frau Wendt</a:t>
-            </a:r>
-          </a:p>
-        </p:txBody>
-      </p:sp>
-      <p:sp>
-        <p:nvSpPr>
-          <p:cNvPr id="62" name="Form"/>
-          <p:cNvSpPr/>
-          <p:nvPr/>
-        </p:nvSpPr>
-        <p:spPr>
-          <a:xfrm>
-            <a:off x="1950041" y="2505640"/>
-            <a:ext cx="43577" cy="27235"/>
-          </a:xfrm>
-          <a:custGeom>
-            <a:avLst/>
-            <a:gdLst/>
-            <a:ahLst/>
-            <a:cxnLst/>
-            <a:rect l="l" t="t" r="r" b="b"/>
-            <a:pathLst>
-              <a:path w="43577" h="27235">
-                <a:moveTo>
-                  <a:pt x="0" y="0"/>
-                </a:moveTo>
-                <a:lnTo>
-                  <a:pt x="43577" y="0"/>
-                </a:lnTo>
-                <a:lnTo>
-                  <a:pt x="21788" y="27235"/>
-                </a:lnTo>
-                <a:close/>
-              </a:path>
-            </a:pathLst>
-          </a:custGeom>
-          <a:solidFill>
-            <a:srgbClr val="3A3F44"/>
-          </a:solidFill>
-          <a:ln>
-            <a:noFill/>
-          </a:ln>
-        </p:spPr>
-        <p:txBody>
-          <a:bodyPr rtlCol="0" anchor="ctr"/>
-          <a:lstStyle/>
-          <a:p>
-            <a:pPr algn="ctr"/>
-          </a:p>
-        </p:txBody>
-      </p:sp>
-      <p:sp>
-        <p:nvSpPr>
-          <p:cNvPr id="63" name="Text mk-label"/>
-          <p:cNvSpPr txBox="1"/>
-          <p:nvPr/>
-        </p:nvSpPr>
-        <p:spPr>
-          <a:xfrm>
-            <a:off x="87153" y="2631793"/>
-            <a:ext cx="553981" cy="87153"/>
-          </a:xfrm>
-          <a:prstGeom prst="rect">
-            <a:avLst/>
-          </a:prstGeom>
-          <a:noFill/>
-        </p:spPr>
-        <p:txBody>
-          <a:bodyPr wrap="none" lIns="0" rIns="0" tIns="0" bIns="0" anchor="t">
-            <a:noAutofit/>
-          </a:bodyPr>
-          <a:lstStyle/>
-          <a:p>
-            <a:pPr algn="l"/>
-            <a:r>
-              <a:rPr sz="600" b="0" i="0" u="none" lang="de-DE">
-                <a:solidFill>
-                  <a:srgbClr val="1A1A1A"/>
-                </a:solidFill>
-                <a:latin typeface="Arial"/>
-              </a:rPr>
-              <a:t>E-Mail-Adresse</a:t>
-            </a:r>
-          </a:p>
-        </p:txBody>
-      </p:sp>
-      <p:sp>
-        <p:nvSpPr>
-          <p:cNvPr id="64" name="f-email"/>
-          <p:cNvSpPr/>
-          <p:nvPr/>
-        </p:nvSpPr>
-        <p:spPr>
-          <a:xfrm>
-            <a:off x="1004979" y="2611857"/>
+            <a:off x="1004979" y="2829739"/>
             <a:ext cx="1040385" cy="136176"/>
           </a:xfrm>
           <a:prstGeom prst="roundRect">
@@ -5299,13 +5326,13 @@
       </p:sp>
       <p:sp>
         <p:nvSpPr>
-          <p:cNvPr id="65" name="Text f-email"/>
+          <p:cNvPr id="66" name="Text f-email"/>
           <p:cNvSpPr txBox="1"/>
           <p:nvPr/>
         </p:nvSpPr>
         <p:spPr>
           <a:xfrm>
-            <a:off x="1045832" y="2631793"/>
+            <a:off x="1045832" y="2849675"/>
             <a:ext cx="911188" cy="87153"/>
           </a:xfrm>
           <a:prstGeom prst="rect">
@@ -5334,13 +5361,13 @@
       </p:sp>
       <p:sp>
         <p:nvSpPr>
-          <p:cNvPr id="66" name="Text mk-label"/>
+          <p:cNvPr id="67" name="Text mk-label"/>
           <p:cNvSpPr txBox="1"/>
           <p:nvPr/>
         </p:nvSpPr>
         <p:spPr>
           <a:xfrm>
-            <a:off x="87153" y="2795204"/>
+            <a:off x="87153" y="3013086"/>
             <a:ext cx="278650" cy="87153"/>
           </a:xfrm>
           <a:prstGeom prst="rect">
@@ -5369,13 +5396,13 @@
       </p:sp>
       <p:sp>
         <p:nvSpPr>
-          <p:cNvPr id="67" name="f-telefon"/>
+          <p:cNvPr id="68" name="f-telefon"/>
           <p:cNvSpPr/>
           <p:nvPr/>
         </p:nvSpPr>
         <p:spPr>
           <a:xfrm>
-            <a:off x="1004979" y="2775268"/>
+            <a:off x="1004979" y="2993150"/>
             <a:ext cx="1040385" cy="136176"/>
           </a:xfrm>
           <a:prstGeom prst="roundRect">
@@ -5402,13 +5429,13 @@
       </p:sp>
       <p:sp>
         <p:nvSpPr>
-          <p:cNvPr id="68" name="Text f-telefon"/>
+          <p:cNvPr id="69" name="Text f-telefon"/>
           <p:cNvSpPr txBox="1"/>
           <p:nvPr/>
         </p:nvSpPr>
         <p:spPr>
           <a:xfrm>
-            <a:off x="1045832" y="2795204"/>
+            <a:off x="1045832" y="3013086"/>
             <a:ext cx="653986" cy="87153"/>
           </a:xfrm>
           <a:prstGeom prst="rect">
@@ -5437,13 +5464,13 @@
       </p:sp>
       <p:cxnSp>
         <p:nvCxnSpPr>
-          <p:cNvPr id="69" name="Linie"/>
+          <p:cNvPr id="70" name="Linie"/>
           <p:cNvCxnSpPr/>
           <p:nvPr/>
         </p:nvCxnSpPr>
         <p:spPr>
           <a:xfrm>
-            <a:off x="87153" y="3107538"/>
+            <a:off x="87153" y="3325420"/>
             <a:ext cx="1960935" cy="0"/>
           </a:xfrm>
           <a:prstGeom prst="line">
@@ -5458,13 +5485,13 @@
       </p:cxnSp>
       <p:sp>
         <p:nvSpPr>
-          <p:cNvPr id="70" name="Text mk-gruppenkopf"/>
+          <p:cNvPr id="71" name="Text mk-gruppenkopf"/>
           <p:cNvSpPr txBox="1"/>
           <p:nvPr/>
         </p:nvSpPr>
         <p:spPr>
           <a:xfrm>
-            <a:off x="87153" y="2980404"/>
+            <a:off x="87153" y="3198286"/>
             <a:ext cx="447934" cy="87153"/>
           </a:xfrm>
           <a:prstGeom prst="rect">
@@ -5493,13 +5520,13 @@
       </p:sp>
       <p:sp>
         <p:nvSpPr>
-          <p:cNvPr id="71" name="Text mk-label"/>
+          <p:cNvPr id="72" name="Text mk-label"/>
           <p:cNvSpPr txBox="1"/>
           <p:nvPr/>
         </p:nvSpPr>
         <p:spPr>
           <a:xfrm>
-            <a:off x="87153" y="3165603"/>
+            <a:off x="87153" y="3383485"/>
             <a:ext cx="630410" cy="87153"/>
           </a:xfrm>
           <a:prstGeom prst="rect">
@@ -5528,13 +5555,13 @@
       </p:sp>
       <p:sp>
         <p:nvSpPr>
-          <p:cNvPr id="72" name="f-formular"/>
+          <p:cNvPr id="73" name="f-formular"/>
           <p:cNvSpPr/>
           <p:nvPr/>
         </p:nvSpPr>
         <p:spPr>
           <a:xfrm>
-            <a:off x="1004979" y="3145667"/>
+            <a:off x="1004979" y="3363549"/>
             <a:ext cx="1040385" cy="136176"/>
           </a:xfrm>
           <a:prstGeom prst="roundRect">
@@ -5561,13 +5588,13 @@
       </p:sp>
       <p:sp>
         <p:nvSpPr>
-          <p:cNvPr id="73" name="Text mk-link"/>
+          <p:cNvPr id="74" name="Text mk-link"/>
           <p:cNvSpPr txBox="1"/>
           <p:nvPr/>
         </p:nvSpPr>
         <p:spPr>
           <a:xfrm>
-            <a:off x="1045832" y="3165603"/>
+            <a:off x="1045832" y="3383485"/>
             <a:ext cx="675774" cy="87153"/>
           </a:xfrm>
           <a:prstGeom prst="rect">
@@ -5596,13 +5623,13 @@
       </p:sp>
       <p:sp>
         <p:nvSpPr>
-          <p:cNvPr id="74" name="Text mk-label"/>
+          <p:cNvPr id="75" name="Text mk-label"/>
           <p:cNvSpPr txBox="1"/>
           <p:nvPr/>
         </p:nvSpPr>
         <p:spPr>
           <a:xfrm>
-            <a:off x="87153" y="3329015"/>
+            <a:off x="87153" y="3546896"/>
             <a:ext cx="685732" cy="87153"/>
           </a:xfrm>
           <a:prstGeom prst="rect">
@@ -5631,13 +5658,13 @@
       </p:sp>
       <p:sp>
         <p:nvSpPr>
-          <p:cNvPr id="75" name="f-handbuch"/>
+          <p:cNvPr id="76" name="f-handbuch"/>
           <p:cNvSpPr/>
           <p:nvPr/>
         </p:nvSpPr>
         <p:spPr>
           <a:xfrm>
-            <a:off x="1004979" y="3309078"/>
+            <a:off x="1004979" y="3526960"/>
             <a:ext cx="1040385" cy="136176"/>
           </a:xfrm>
           <a:prstGeom prst="roundRect">
@@ -5664,14 +5691,14 @@
       </p:sp>
       <p:sp>
         <p:nvSpPr>
-          <p:cNvPr id="76" name="Text mk-label"/>
+          <p:cNvPr id="77" name="Text mk-link"/>
           <p:cNvSpPr txBox="1"/>
           <p:nvPr/>
         </p:nvSpPr>
         <p:spPr>
           <a:xfrm>
-            <a:off x="87153" y="3492426"/>
-            <a:ext cx="664454" cy="87153"/>
+            <a:off x="1045832" y="3546896"/>
+            <a:ext cx="675774" cy="87153"/>
           </a:xfrm>
           <a:prstGeom prst="rect">
             <a:avLst/>
@@ -5686,6 +5713,41 @@
           <a:p>
             <a:pPr algn="l"/>
             <a:r>
+              <a:rPr sz="600" b="0" i="0" u="sng" lang="de-DE">
+                <a:solidFill>
+                  <a:srgbClr val="3A3F44"/>
+                </a:solidFill>
+                <a:latin typeface="Arial"/>
+              </a:rPr>
+              <a:t>Zugangslink öffnen</a:t>
+            </a:r>
+          </a:p>
+        </p:txBody>
+      </p:sp>
+      <p:sp>
+        <p:nvSpPr>
+          <p:cNvPr id="78" name="Text mk-label"/>
+          <p:cNvSpPr txBox="1"/>
+          <p:nvPr/>
+        </p:nvSpPr>
+        <p:spPr>
+          <a:xfrm>
+            <a:off x="87153" y="3710308"/>
+            <a:ext cx="664454" cy="87153"/>
+          </a:xfrm>
+          <a:prstGeom prst="rect">
+            <a:avLst/>
+          </a:prstGeom>
+          <a:noFill/>
+        </p:spPr>
+        <p:txBody>
+          <a:bodyPr wrap="none" lIns="0" rIns="0" tIns="0" bIns="0" anchor="t">
+            <a:noAutofit/>
+          </a:bodyPr>
+          <a:lstStyle/>
+          <a:p>
+            <a:pPr algn="l"/>
+            <a:r>
               <a:rPr sz="600" b="0" i="0" u="none" lang="de-DE">
                 <a:solidFill>
                   <a:srgbClr val="1A1A1A"/>
@@ -5699,13 +5761,13 @@
       </p:sp>
       <p:sp>
         <p:nvSpPr>
-          <p:cNvPr id="77" name="f-leitfaden"/>
+          <p:cNvPr id="79" name="f-leitfaden"/>
           <p:cNvSpPr/>
           <p:nvPr/>
         </p:nvSpPr>
         <p:spPr>
           <a:xfrm>
-            <a:off x="1004979" y="3472490"/>
+            <a:off x="1004979" y="3690371"/>
             <a:ext cx="1040385" cy="136176"/>
           </a:xfrm>
           <a:prstGeom prst="roundRect">
@@ -5732,13 +5794,13 @@
       </p:sp>
       <p:sp>
         <p:nvSpPr>
-          <p:cNvPr id="78" name="Text mk-link"/>
+          <p:cNvPr id="80" name="Text mk-link"/>
           <p:cNvSpPr txBox="1"/>
           <p:nvPr/>
         </p:nvSpPr>
         <p:spPr>
           <a:xfrm>
-            <a:off x="1045832" y="3492426"/>
+            <a:off x="1045832" y="3710308"/>
             <a:ext cx="612111" cy="87153"/>
           </a:xfrm>
           <a:prstGeom prst="rect">
@@ -5767,13 +5829,13 @@
       </p:sp>
       <p:cxnSp>
         <p:nvCxnSpPr>
-          <p:cNvPr id="79" name="Linie"/>
+          <p:cNvPr id="81" name="Linie"/>
           <p:cNvCxnSpPr/>
           <p:nvPr/>
         </p:nvCxnSpPr>
         <p:spPr>
           <a:xfrm>
-            <a:off x="2157029" y="1876506"/>
+            <a:off x="2157029" y="2094388"/>
             <a:ext cx="1715818" cy="0"/>
           </a:xfrm>
           <a:prstGeom prst="line">
@@ -5788,13 +5850,13 @@
       </p:cxnSp>
       <p:sp>
         <p:nvSpPr>
-          <p:cNvPr id="80" name="Text brief-kopf"/>
+          <p:cNvPr id="82" name="Text brief-kopf"/>
           <p:cNvSpPr txBox="1"/>
           <p:nvPr/>
         </p:nvSpPr>
         <p:spPr>
           <a:xfrm>
-            <a:off x="2157029" y="1749372"/>
+            <a:off x="2157029" y="1967254"/>
             <a:ext cx="1494532" cy="87153"/>
           </a:xfrm>
           <a:prstGeom prst="rect">
@@ -5823,13 +5885,13 @@
       </p:sp>
       <p:sp>
         <p:nvSpPr>
-          <p:cNvPr id="81" name="brief"/>
+          <p:cNvPr id="83" name="brief"/>
           <p:cNvSpPr/>
           <p:nvPr/>
         </p:nvSpPr>
         <p:spPr>
           <a:xfrm>
-            <a:off x="2159752" y="1914635"/>
+            <a:off x="2159752" y="2132517"/>
             <a:ext cx="1710371" cy="1694030"/>
           </a:xfrm>
           <a:prstGeom prst="roundRect">
@@ -5856,13 +5918,13 @@
       </p:sp>
       <p:sp>
         <p:nvSpPr>
-          <p:cNvPr id="82" name="Text P"/>
+          <p:cNvPr id="84" name="Text P"/>
           <p:cNvSpPr txBox="1"/>
           <p:nvPr/>
         </p:nvSpPr>
         <p:spPr>
           <a:xfrm>
-            <a:off x="2216946" y="1961807"/>
+            <a:off x="2216946" y="2179689"/>
             <a:ext cx="1461084" cy="87153"/>
           </a:xfrm>
           <a:prstGeom prst="rect">
@@ -5891,13 +5953,13 @@
       </p:sp>
       <p:sp>
         <p:nvSpPr>
-          <p:cNvPr id="83" name="Text P"/>
+          <p:cNvPr id="85" name="Text P"/>
           <p:cNvSpPr txBox="1"/>
           <p:nvPr/>
         </p:nvSpPr>
         <p:spPr>
           <a:xfrm>
-            <a:off x="2216946" y="2102793"/>
+            <a:off x="2216946" y="2320674"/>
             <a:ext cx="1579898" cy="392187"/>
           </a:xfrm>
           <a:prstGeom prst="rect">
@@ -5939,7 +6001,7 @@
                 </a:solidFill>
                 <a:latin typeface="Arial"/>
               </a:rPr>
-              <a:t>das Budget 2027 vorzunehmen. Der Zeitraum</a:t>
+              <a:t>das Budget 2028 vorzunehmen. Der Zeitraum</a:t>
             </a:r>
           </a:p>
           <a:p>
@@ -5955,7 +6017,7 @@
                 </a:solidFill>
                 <a:latin typeface="Arial"/>
               </a:rPr>
-              <a:t>für die Planung ist vom 14.09.2026 bis zum</a:t>
+              <a:t>für die Planung ist vom 14.09.2027 bis zum</a:t>
             </a:r>
           </a:p>
           <a:p>
@@ -5971,20 +6033,20 @@
                 </a:solidFill>
                 <a:latin typeface="Arial"/>
               </a:rPr>
-              <a:t>25.09.2026 vorgesehen.</a:t>
-            </a:r>
-          </a:p>
-        </p:txBody>
-      </p:sp>
-      <p:sp>
-        <p:nvSpPr>
-          <p:cNvPr id="84" name="Text P"/>
+              <a:t>25.09.2027 vorgesehen.</a:t>
+            </a:r>
+          </a:p>
+        </p:txBody>
+      </p:sp>
+      <p:sp>
+        <p:nvSpPr>
+          <p:cNvPr id="86" name="Text P"/>
           <p:cNvSpPr txBox="1"/>
           <p:nvPr/>
         </p:nvSpPr>
         <p:spPr>
           <a:xfrm>
-            <a:off x="2216946" y="2538556"/>
+            <a:off x="2216946" y="2756438"/>
             <a:ext cx="1457169" cy="196094"/>
           </a:xfrm>
           <a:prstGeom prst="rect">
@@ -6010,7 +6072,7 @@
                 </a:solidFill>
                 <a:latin typeface="Arial"/>
               </a:rPr>
-              <a:t>Für das Planjahr 2027 gehen Sie bitte von</a:t>
+              <a:t>Für das Planjahr 2028 gehen Sie bitte von</a:t>
             </a:r>
           </a:p>
           <a:p>
@@ -6033,13 +6095,13 @@
       </p:sp>
       <p:sp>
         <p:nvSpPr>
-          <p:cNvPr id="85" name="Text SPAN"/>
+          <p:cNvPr id="87" name="Text SPAN"/>
           <p:cNvSpPr txBox="1"/>
           <p:nvPr/>
         </p:nvSpPr>
         <p:spPr>
           <a:xfrm>
-            <a:off x="2216946" y="2778863"/>
+            <a:off x="2216946" y="2996745"/>
             <a:ext cx="490574" cy="87153"/>
           </a:xfrm>
           <a:prstGeom prst="rect">
@@ -6068,13 +6130,13 @@
       </p:sp>
       <p:sp>
         <p:nvSpPr>
-          <p:cNvPr id="86" name="Text SPAN"/>
+          <p:cNvPr id="88" name="Text SPAN"/>
           <p:cNvSpPr txBox="1"/>
           <p:nvPr/>
         </p:nvSpPr>
         <p:spPr>
           <a:xfrm>
-            <a:off x="3187541" y="2778863"/>
+            <a:off x="3187541" y="2996745"/>
             <a:ext cx="227754" cy="87153"/>
           </a:xfrm>
           <a:prstGeom prst="rect">
@@ -6103,13 +6165,13 @@
       </p:sp>
       <p:sp>
         <p:nvSpPr>
-          <p:cNvPr id="87" name="Text SPAN"/>
+          <p:cNvPr id="89" name="Text SPAN"/>
           <p:cNvSpPr txBox="1"/>
           <p:nvPr/>
         </p:nvSpPr>
         <p:spPr>
           <a:xfrm>
-            <a:off x="2216946" y="2876910"/>
+            <a:off x="2216946" y="3094792"/>
             <a:ext cx="774246" cy="87153"/>
           </a:xfrm>
           <a:prstGeom prst="rect">
@@ -6138,13 +6200,13 @@
       </p:sp>
       <p:sp>
         <p:nvSpPr>
-          <p:cNvPr id="88" name="Text SPAN"/>
+          <p:cNvPr id="90" name="Text SPAN"/>
           <p:cNvSpPr txBox="1"/>
           <p:nvPr/>
         </p:nvSpPr>
         <p:spPr>
           <a:xfrm>
-            <a:off x="3187541" y="2876910"/>
+            <a:off x="3187541" y="3094792"/>
             <a:ext cx="227754" cy="87153"/>
           </a:xfrm>
           <a:prstGeom prst="rect">
@@ -6173,13 +6235,13 @@
       </p:sp>
       <p:sp>
         <p:nvSpPr>
-          <p:cNvPr id="89" name="Text SPAN"/>
+          <p:cNvPr id="91" name="Text SPAN"/>
           <p:cNvSpPr txBox="1"/>
           <p:nvPr/>
         </p:nvSpPr>
         <p:spPr>
           <a:xfrm>
-            <a:off x="2216946" y="2974957"/>
+            <a:off x="2216946" y="3192839"/>
             <a:ext cx="880548" cy="87153"/>
           </a:xfrm>
           <a:prstGeom prst="rect">
@@ -6208,13 +6270,13 @@
       </p:sp>
       <p:sp>
         <p:nvSpPr>
-          <p:cNvPr id="90" name="Text SPAN"/>
+          <p:cNvPr id="92" name="Text SPAN"/>
           <p:cNvSpPr txBox="1"/>
           <p:nvPr/>
         </p:nvSpPr>
         <p:spPr>
           <a:xfrm>
-            <a:off x="3187541" y="2974957"/>
+            <a:off x="3187541" y="3192839"/>
             <a:ext cx="227754" cy="87153"/>
           </a:xfrm>
           <a:prstGeom prst="rect">
@@ -6243,13 +6305,13 @@
       </p:sp>
       <p:sp>
         <p:nvSpPr>
-          <p:cNvPr id="91" name="Text SPAN"/>
+          <p:cNvPr id="93" name="Text SPAN"/>
           <p:cNvSpPr txBox="1"/>
           <p:nvPr/>
         </p:nvSpPr>
         <p:spPr>
           <a:xfrm>
-            <a:off x="2216946" y="3073004"/>
+            <a:off x="2216946" y="3290885"/>
             <a:ext cx="655603" cy="87153"/>
           </a:xfrm>
           <a:prstGeom prst="rect">
@@ -6278,13 +6340,13 @@
       </p:sp>
       <p:sp>
         <p:nvSpPr>
-          <p:cNvPr id="92" name="Text SPAN"/>
+          <p:cNvPr id="94" name="Text SPAN"/>
           <p:cNvSpPr txBox="1"/>
           <p:nvPr/>
         </p:nvSpPr>
         <p:spPr>
           <a:xfrm>
-            <a:off x="3187541" y="3073004"/>
+            <a:off x="3187541" y="3290885"/>
             <a:ext cx="227754" cy="87153"/>
           </a:xfrm>
           <a:prstGeom prst="rect">
@@ -6313,13 +6375,13 @@
       </p:sp>
       <p:sp>
         <p:nvSpPr>
-          <p:cNvPr id="93" name="Text P"/>
+          <p:cNvPr id="95" name="Text P"/>
           <p:cNvSpPr txBox="1"/>
           <p:nvPr/>
         </p:nvSpPr>
         <p:spPr>
           <a:xfrm>
-            <a:off x="2216946" y="3213989"/>
+            <a:off x="2216946" y="3431871"/>
             <a:ext cx="1495128" cy="196094"/>
           </a:xfrm>
           <a:prstGeom prst="rect">
@@ -6368,13 +6430,13 @@
       </p:sp>
       <p:sp>
         <p:nvSpPr>
-          <p:cNvPr id="94" name="Text mk-link"/>
+          <p:cNvPr id="96" name="Text mk-link"/>
           <p:cNvSpPr txBox="1"/>
           <p:nvPr/>
         </p:nvSpPr>
         <p:spPr>
           <a:xfrm>
-            <a:off x="2216946" y="3454297"/>
+            <a:off x="2216946" y="3672178"/>
             <a:ext cx="1151879" cy="87153"/>
           </a:xfrm>
           <a:prstGeom prst="rect">
@@ -6403,13 +6465,13 @@
       </p:sp>
       <p:sp>
         <p:nvSpPr>
-          <p:cNvPr id="95" name="k-veroeffentlichen"/>
+          <p:cNvPr id="97" name="k-veroeffentlichen"/>
           <p:cNvSpPr/>
           <p:nvPr/>
         </p:nvSpPr>
         <p:spPr>
           <a:xfrm>
-            <a:off x="89876" y="3701265"/>
+            <a:off x="89876" y="3919147"/>
             <a:ext cx="1246266" cy="157964"/>
           </a:xfrm>
           <a:prstGeom prst="roundRect">
@@ -6436,13 +6498,13 @@
       </p:sp>
       <p:sp>
         <p:nvSpPr>
-          <p:cNvPr id="96" name="Text k-veroeffentlichen"/>
+          <p:cNvPr id="98" name="Text k-veroeffentlichen"/>
           <p:cNvSpPr txBox="1"/>
           <p:nvPr/>
         </p:nvSpPr>
         <p:spPr>
           <a:xfrm>
-            <a:off x="179752" y="3732096"/>
+            <a:off x="179752" y="3949977"/>
             <a:ext cx="1099196" cy="87153"/>
           </a:xfrm>
           <a:prstGeom prst="rect">
